--- a/content/W04/D2/slides/C2_W04_D02_half2_STUDENT.pptx
+++ b/content/W04/D2/slides/C2_W04_D02_half2_STUDENT.pptx
@@ -11715,7 +11715,7 @@
       </p:sp>
       <p:pic>
         <p:nvPicPr>
-          <p:cNvPr id="9" name="mermaid diagram" descr="789d7885f9c2a416.png"/>
+          <p:cNvPr id="9" name="mermaid diagram" descr="d33e80112993a4e1.png"/>
           <p:cNvPicPr>
             <a:picLocks noChangeAspect="1"/>
           </p:cNvPicPr>
@@ -11729,8 +11729,8 @@
         </p:blipFill>
         <p:spPr>
           <a:xfrm>
-            <a:off x="2152497" y="1803051"/>
-            <a:ext cx="7886700" cy="3357562"/>
+            <a:off x="2152497" y="1956816"/>
+            <a:ext cx="7886700" cy="1857375"/>
           </a:xfrm>
           <a:prstGeom prst="rect">
             <a:avLst/>
@@ -11745,8 +11745,8 @@
         </p:nvSpPr>
         <p:spPr>
           <a:xfrm>
-            <a:off x="530352" y="5306917"/>
-            <a:ext cx="11130991" cy="772160"/>
+            <a:off x="530352" y="3960495"/>
+            <a:ext cx="11130991" cy="1048512"/>
           </a:xfrm>
           <a:prstGeom prst="rect">
             <a:avLst/>
@@ -11764,6 +11764,24 @@
                 <a:spcPts val="800"/>
               </a:spcAft>
             </a:pPr>
+            <a:r>
+              <a:rPr sz="1600" b="1" i="0">
+                <a:solidFill>
+                  <a:srgbClr val="1A1440"/>
+                </a:solidFill>
+                <a:latin typeface="Calibri"/>
+              </a:rPr>
+              <a:t>Tuesday's node now carries</a:t>
+            </a:r>
+            <a:r>
+              <a:rPr sz="1600" b="0" i="0">
+                <a:solidFill>
+                  <a:srgbClr val="1A1440"/>
+                </a:solidFill>
+                <a:latin typeface="Calibri"/>
+              </a:rPr>
+              <a:t> the slide (Rs 314 to Rs 260 per online hour, defended in four moves, one appendix page per role) and the estimate (about 5,700 drivers, between 2,900 and 8,600). </a:t>
+            </a:r>
             <a:r>
               <a:rPr sz="1600" b="1" i="0">
                 <a:solidFill>
@@ -13464,7 +13482,7 @@
         <p:spPr>
           <a:xfrm>
             <a:off x="6388455" y="3303524"/>
-            <a:ext cx="2243251" cy="399796"/>
+            <a:ext cx="2243251" cy="581406"/>
           </a:xfrm>
           <a:prstGeom prst="rect">
             <a:avLst/>
@@ -13485,7 +13503,7 @@
                 </a:solidFill>
                 <a:latin typeface="Calibri"/>
               </a:rPr>
-              <a:t>In the body of the page, not in a bracket at the end</a:t>
+              <a:t>In the body of the page, where the reader meets it before the action</a:t>
             </a:r>
           </a:p>
         </p:txBody>
@@ -16008,7 +16026,7 @@
         </p:nvGraphicFramePr>
         <p:xfrm>
           <a:off x="530352" y="1956816"/>
-          <a:ext cx="11130990" cy="1948688"/>
+          <a:ext cx="11130990" cy="2190496"/>
         </p:xfrm>
         <a:graphic>
           <a:graphicData uri="http://schemas.openxmlformats.org/drawingml/2006/table">
@@ -16066,7 +16084,7 @@
                   </a:tcPr>
                 </a:tc>
               </a:tr>
-              <a:tr h="1578864">
+              <a:tr h="1820672">
                 <a:tc>
                   <a:txBody>
                     <a:bodyPr/>
@@ -16101,7 +16119,7 @@
                           </a:solidFill>
                           <a:latin typeface="Calibri"/>
                         </a:rPr>
-                        <a:t>"The scheme is paying for online hours that carry no trips. An hour online used to bring in Rs 314 of fares and now brings in Rs 260 at the same fare. Part of that may be the monsoon. Paying per completed trip with an acceptance floor returns Rs 58 lakh to Rs 93 lakh over six weeks if a fifth to a half of idle drivers start accepting."</a:t>
+                        <a:t>"The scheme is paying for online hours that carry no trips. An hour online used to bring in Rs 314 of fares and now brings in Rs 260 at the same fare. Part of that may be the monsoon. Paying per completed trip with an acceptance floor returns Rs 58 lakh to Rs 92.7 lakh over six weeks depending on whether half or a fifth of idle drivers start accepting."</a:t>
                       </a:r>
                     </a:p>
                   </a:txBody>
@@ -16124,7 +16142,7 @@
         </p:nvSpPr>
         <p:spPr>
           <a:xfrm>
-            <a:off x="530352" y="4161536"/>
+            <a:off x="530352" y="4403344"/>
             <a:ext cx="11130991" cy="1074420"/>
           </a:xfrm>
           <a:prstGeom prst="roundRect">
@@ -16172,7 +16190,7 @@
         </p:nvSpPr>
         <p:spPr>
           <a:xfrm>
-            <a:off x="676656" y="4289552"/>
+            <a:off x="676656" y="4531360"/>
             <a:ext cx="45720" cy="818388"/>
           </a:xfrm>
           <a:prstGeom prst="roundRect">
@@ -16218,7 +16236,7 @@
         </p:nvSpPr>
         <p:spPr>
           <a:xfrm>
-            <a:off x="877824" y="4280408"/>
+            <a:off x="877824" y="4522216"/>
             <a:ext cx="10564063" cy="891540"/>
           </a:xfrm>
           <a:prstGeom prst="rect">
@@ -22270,7 +22288,7 @@
                 </a:solidFill>
                 <a:latin typeface="Georgia"/>
               </a:rPr>
-              <a:t>"The scheme is paying for online hours that carry no trips: Rs 314 to Rs 260 per peak online hour at a flat Rs 165 fare. Part of it may be the monsoon. Pay per completed peak trip with an acceptance floor, which returns Rs 58 lakh to Rs 93 lakh over six weeks if a fifth to a half of idle drivers start accepting. At the evening peak the city needs about 5,700 drivers online, between 2,900 and 8,600."</a:t>
+              <a:t>"The scheme is paying for online hours that carry no trips: Rs 314 to Rs 260 per peak online hour at a flat Rs 165 fare. Part of it may be the monsoon. Pay per completed peak trip with an acceptance floor, which returns Rs 58 lakh to Rs 92.7 lakh over six weeks depending on whether half or a fifth of idle drivers start accepting. At the evening peak the city needs about 5,700 drivers online, between 2,900 and 8,600."</a:t>
             </a:r>
           </a:p>
         </p:txBody>
@@ -23096,7 +23114,7 @@
                 </a:solidFill>
                 <a:latin typeface="Calibri"/>
               </a:rPr>
-              <a:t>- a) Monday's rider requests after the launch, 2,56,556 over six weeks</a:t>
+              <a:t>a) Monday's rider requests after the launch, 2,56,556 over six weeks</a:t>
             </a:r>
           </a:p>
           <a:p>
@@ -23112,7 +23130,7 @@
                 </a:solidFill>
                 <a:latin typeface="Calibri"/>
               </a:rPr>
-              <a:t>- b) A published count of Uber drivers signed up in Hyderabad</a:t>
+              <a:t>b) A published count of Uber drivers signed up in Hyderabad</a:t>
             </a:r>
           </a:p>
           <a:p>
@@ -23128,7 +23146,7 @@
                 </a:solidFill>
                 <a:latin typeface="Calibri"/>
               </a:rPr>
-              <a:t>- c) A published count of Uber drivers online at one weekday evening peak in Hyderabad</a:t>
+              <a:t>c) A published count of Uber drivers online at one weekday evening peak in Hyderabad</a:t>
             </a:r>
           </a:p>
           <a:p>
@@ -23144,7 +23162,7 @@
                 </a:solidFill>
                 <a:latin typeface="Calibri"/>
               </a:rPr>
-              <a:t>- d) The online driver-hours behind each rider request in the case's own data</a:t>
+              <a:t>d) The online driver-hours behind each rider request in the case's own data</a:t>
             </a:r>
           </a:p>
         </p:txBody>
@@ -25516,7 +25534,7 @@
         </p:nvGraphicFramePr>
         <p:xfrm>
           <a:off x="530352" y="1956816"/>
-          <a:ext cx="11130990" cy="2218944"/>
+          <a:ext cx="11130990" cy="2460752"/>
         </p:xfrm>
         <a:graphic>
           <a:graphicData uri="http://schemas.openxmlformats.org/drawingml/2006/table">
@@ -25525,8 +25543,8 @@
                 <a:tableStyleId>{2D5ABB26-0587-4C30-8999-92F81FD0307C}</a:tableStyleId>
               </a:tblPr>
               <a:tblGrid>
-                <a:gridCol w="3332454"/>
-                <a:gridCol w="7798536"/>
+                <a:gridCol w="3006662"/>
+                <a:gridCol w="8124328"/>
               </a:tblGrid>
               <a:tr h="369824">
                 <a:tc>
@@ -25666,7 +25684,7 @@
                   </a:tcPr>
                 </a:tc>
               </a:tr>
-              <a:tr h="369824">
+              <a:tr h="611632">
                 <a:tc>
                   <a:txBody>
                     <a:bodyPr/>
@@ -25701,7 +25719,7 @@
                           </a:solidFill>
                           <a:latin typeface="Calibri"/>
                         </a:rPr>
-                        <a:t>At one moment of the window, not counted across it</a:t>
+                        <a:t>At one moment inside the window, since a count summed over three hours is another unit</a:t>
                       </a:r>
                     </a:p>
                   </a:txBody>
@@ -25816,7 +25834,7 @@
         </p:nvSpPr>
         <p:spPr>
           <a:xfrm>
-            <a:off x="530352" y="4431792"/>
+            <a:off x="530352" y="4673600"/>
             <a:ext cx="11130991" cy="807720"/>
           </a:xfrm>
           <a:prstGeom prst="roundRect">
@@ -25864,7 +25882,7 @@
         </p:nvSpPr>
         <p:spPr>
           <a:xfrm>
-            <a:off x="676656" y="4559808"/>
+            <a:off x="676656" y="4801616"/>
             <a:ext cx="45720" cy="551688"/>
           </a:xfrm>
           <a:prstGeom prst="roundRect">
@@ -25910,7 +25928,7 @@
         </p:nvSpPr>
         <p:spPr>
           <a:xfrm>
-            <a:off x="877824" y="4550664"/>
+            <a:off x="877824" y="4792472"/>
             <a:ext cx="10564063" cy="624840"/>
           </a:xfrm>
           <a:prstGeom prst="rect">
@@ -26460,7 +26478,7 @@
       </p:sp>
       <p:pic>
         <p:nvPicPr>
-          <p:cNvPr id="9" name="mermaid diagram" descr="e4c31bbe7940095e.png"/>
+          <p:cNvPr id="9" name="mermaid diagram" descr="803fa967d70fa5f8.png"/>
           <p:cNvPicPr>
             <a:picLocks noChangeAspect="1"/>
           </p:cNvPicPr>
@@ -26474,8 +26492,8 @@
         </p:blipFill>
         <p:spPr>
           <a:xfrm>
-            <a:off x="2401228" y="1664208"/>
-            <a:ext cx="7389238" cy="3250692"/>
+            <a:off x="1115415" y="1664208"/>
+            <a:ext cx="9960864" cy="3532632"/>
           </a:xfrm>
           <a:prstGeom prst="rect">
             <a:avLst/>
@@ -26484,67 +26502,60 @@
       </p:pic>
       <p:sp>
         <p:nvSpPr>
-          <p:cNvPr id="10" name="Rounded Rectangle 9"/>
+          <p:cNvPr id="10" name="TextBox 9"/>
+          <p:cNvSpPr txBox="1"/>
+          <p:nvPr/>
+        </p:nvSpPr>
+        <p:spPr>
+          <a:xfrm>
+            <a:off x="530352" y="5242560"/>
+            <a:ext cx="11130991" cy="957072"/>
+          </a:xfrm>
+          <a:prstGeom prst="rect">
+            <a:avLst/>
+          </a:prstGeom>
+          <a:noFill/>
+        </p:spPr>
+        <p:txBody>
+          <a:bodyPr wrap="square" anchor="t" lIns="0" rIns="0" tIns="0" bIns="0">
+            <a:spAutoFit/>
+          </a:bodyPr>
+          <a:lstStyle/>
+          <a:p>
+            <a:r>
+              <a:rPr sz="1600" b="1" i="0">
+                <a:solidFill>
+                  <a:srgbClr val="1A1440"/>
+                </a:solidFill>
+                <a:latin typeface="Calibri"/>
+              </a:rPr>
+              <a:t>Drivers online = requests an hour / trips per online driver-hour x buffer.</a:t>
+            </a:r>
+            <a:r>
+              <a:rPr sz="1600" b="0" i="0">
+                <a:solidFill>
+                  <a:srgbClr val="1A1440"/>
+                </a:solidFill>
+                <a:latin typeface="Calibri"/>
+              </a:rPr>
+              <a:t> Each leaf is an assumption with a range. A trip at the peak takes about 25 minutes from accepting to dropping, so a busy driver fits 2.4 an hour; the idle share is the share of online drivers with no rider at that moment.</a:t>
+            </a:r>
+          </a:p>
+        </p:txBody>
+      </p:sp>
+      <p:sp>
+        <p:nvSpPr>
+          <p:cNvPr id="11" name="Oval 10"/>
           <p:cNvSpPr/>
           <p:nvPr/>
         </p:nvSpPr>
         <p:spPr>
           <a:xfrm>
-            <a:off x="530352" y="4960620"/>
-            <a:ext cx="11130991" cy="1074420"/>
-          </a:xfrm>
-          <a:prstGeom prst="roundRect">
-            <a:avLst>
-              <a:gd name="adj" fmla="val 8000"/>
-            </a:avLst>
-          </a:prstGeom>
-          <a:solidFill>
-            <a:srgbClr val="F7F5FD"/>
-          </a:solidFill>
-          <a:ln w="9525">
-            <a:solidFill>
-              <a:srgbClr val="E4E1F1"/>
-            </a:solidFill>
-          </a:ln>
-          <a:effectLst/>
-        </p:spPr>
-        <p:style>
-          <a:lnRef idx="1">
-            <a:schemeClr val="accent1"/>
-          </a:lnRef>
-          <a:fillRef idx="3">
-            <a:schemeClr val="accent1"/>
-          </a:fillRef>
-          <a:effectRef idx="2">
-            <a:schemeClr val="accent1"/>
-          </a:effectRef>
-          <a:fontRef idx="minor">
-            <a:schemeClr val="lt1"/>
-          </a:fontRef>
-        </p:style>
-        <p:txBody>
-          <a:bodyPr rtlCol="0" anchor="ctr" wrap="square"/>
-          <a:lstStyle/>
-          <a:p>
-            <a:pPr algn="ctr"/>
-          </a:p>
-        </p:txBody>
-      </p:sp>
-      <p:sp>
-        <p:nvSpPr>
-          <p:cNvPr id="11" name="Rounded Rectangle 10"/>
-          <p:cNvSpPr/>
-          <p:nvPr/>
-        </p:nvSpPr>
-        <p:spPr>
-          <a:xfrm>
-            <a:off x="676656" y="5088636"/>
-            <a:ext cx="45720" cy="818388"/>
-          </a:xfrm>
-          <a:prstGeom prst="roundRect">
-            <a:avLst>
-              <a:gd name="adj" fmla="val 50000"/>
-            </a:avLst>
+            <a:off x="530352" y="6492240"/>
+            <a:ext cx="64008" cy="64008"/>
+          </a:xfrm>
+          <a:prstGeom prst="ellipse">
+            <a:avLst/>
           </a:prstGeom>
           <a:solidFill>
             <a:srgbClr val="5B3FD6"/>
@@ -26584,93 +26595,6 @@
         </p:nvSpPr>
         <p:spPr>
           <a:xfrm>
-            <a:off x="877824" y="5079492"/>
-            <a:ext cx="10564063" cy="891540"/>
-          </a:xfrm>
-          <a:prstGeom prst="rect">
-            <a:avLst/>
-          </a:prstGeom>
-          <a:noFill/>
-        </p:spPr>
-        <p:txBody>
-          <a:bodyPr wrap="square" anchor="ctr" lIns="0" rIns="0" tIns="0" bIns="0">
-            <a:spAutoFit/>
-          </a:bodyPr>
-          <a:lstStyle/>
-          <a:p>
-            <a:r>
-              <a:rPr sz="1500" b="1">
-                <a:solidFill>
-                  <a:srgbClr val="5B3FD6"/>
-                </a:solidFill>
-                <a:latin typeface="Calibri"/>
-              </a:rPr>
-              <a:t>Each leaf is an assumption with a range. </a:t>
-            </a:r>
-            <a:r>
-              <a:rPr sz="1500" b="0" i="0">
-                <a:solidFill>
-                  <a:srgbClr val="1A1440"/>
-                </a:solidFill>
-                <a:latin typeface="Calibri"/>
-              </a:rPr>
-              <a:t>A trip at the peak takes about 25 minutes from accepting to dropping, so a busy driver fits 2.4 an hour; the idle share is the share of online drivers with no rider at that moment.</a:t>
-            </a:r>
-          </a:p>
-        </p:txBody>
-      </p:sp>
-      <p:sp>
-        <p:nvSpPr>
-          <p:cNvPr id="13" name="Oval 12"/>
-          <p:cNvSpPr/>
-          <p:nvPr/>
-        </p:nvSpPr>
-        <p:spPr>
-          <a:xfrm>
-            <a:off x="530352" y="6492240"/>
-            <a:ext cx="64008" cy="64008"/>
-          </a:xfrm>
-          <a:prstGeom prst="ellipse">
-            <a:avLst/>
-          </a:prstGeom>
-          <a:solidFill>
-            <a:srgbClr val="5B3FD6"/>
-          </a:solidFill>
-          <a:ln>
-            <a:noFill/>
-          </a:ln>
-          <a:effectLst/>
-        </p:spPr>
-        <p:style>
-          <a:lnRef idx="1">
-            <a:schemeClr val="accent1"/>
-          </a:lnRef>
-          <a:fillRef idx="3">
-            <a:schemeClr val="accent1"/>
-          </a:fillRef>
-          <a:effectRef idx="2">
-            <a:schemeClr val="accent1"/>
-          </a:effectRef>
-          <a:fontRef idx="minor">
-            <a:schemeClr val="lt1"/>
-          </a:fontRef>
-        </p:style>
-        <p:txBody>
-          <a:bodyPr rtlCol="0" anchor="ctr" wrap="square"/>
-          <a:lstStyle/>
-          <a:p>
-            <a:pPr algn="ctr"/>
-          </a:p>
-        </p:txBody>
-      </p:sp>
-      <p:sp>
-        <p:nvSpPr>
-          <p:cNvPr id="14" name="TextBox 13"/>
-          <p:cNvSpPr txBox="1"/>
-          <p:nvPr/>
-        </p:nvSpPr>
-        <p:spPr>
-          <a:xfrm>
             <a:off x="640080" y="6437376"/>
             <a:ext cx="1332452" cy="152146"/>
           </a:xfrm>
@@ -26700,7 +26624,7 @@
       </p:sp>
       <p:sp>
         <p:nvSpPr>
-          <p:cNvPr id="15" name="Oval 14"/>
+          <p:cNvPr id="13" name="Oval 12"/>
           <p:cNvSpPr/>
           <p:nvPr/>
         </p:nvSpPr>
@@ -26744,7 +26668,7 @@
       </p:sp>
       <p:sp>
         <p:nvSpPr>
-          <p:cNvPr id="16" name="TextBox 15"/>
+          <p:cNvPr id="14" name="TextBox 13"/>
           <p:cNvSpPr txBox="1"/>
           <p:nvPr/>
         </p:nvSpPr>
@@ -26779,7 +26703,7 @@
       </p:sp>
       <p:sp>
         <p:nvSpPr>
-          <p:cNvPr id="17" name="Oval 16"/>
+          <p:cNvPr id="15" name="Oval 14"/>
           <p:cNvSpPr/>
           <p:nvPr/>
         </p:nvSpPr>
@@ -26823,7 +26747,7 @@
       </p:sp>
       <p:sp>
         <p:nvSpPr>
-          <p:cNvPr id="18" name="TextBox 17"/>
+          <p:cNvPr id="16" name="TextBox 15"/>
           <p:cNvSpPr txBox="1"/>
           <p:nvPr/>
         </p:nvSpPr>
@@ -26858,7 +26782,7 @@
       </p:sp>
       <p:sp>
         <p:nvSpPr>
-          <p:cNvPr id="19" name="TextBox 18"/>
+          <p:cNvPr id="17" name="TextBox 16"/>
           <p:cNvSpPr txBox="1"/>
           <p:nvPr/>
         </p:nvSpPr>

--- a/content/W04/D2/slides/C2_W04_D02_half2_STUDENT.pptx
+++ b/content/W04/D2/slides/C2_W04_D02_half2_STUDENT.pptx
@@ -638,12 +638,22 @@
           <a:lstStyle/>
           <a:p>
             <a:r>
-              <a:t>LIVE, 3 minutes. Synthetic, labelled: these are the case's numbers, not Uber's. The chain errs on</a:t>
-            </a:r>
-          </a:p>
-          <a:p>
-            <a:r>
-              <a:t>the generous side, so the buffer is the first factor to trim.</a:t>
+              <a:t>LIVE, 3 minutes. Like for like means per completed trip on both sides: the chain counts trips, so</a:t>
+            </a:r>
+          </a:p>
+          <a:p>
+            <a:r>
+              <a:t>the case's hours are divided by its trips, never its requests (0.47 per request mixes in the 11</a:t>
+            </a:r>
+          </a:p>
+          <a:p>
+            <a:r>
+              <a:t>percent of requests nobody served). The idle share checks the same way: 1.90 trips x 25 minutes</a:t>
+            </a:r>
+          </a:p>
+          <a:p>
+            <a:r>
+              <a:t>leaves an idle share of about 0.21 before the launch, the window that held the wait at 4.8 minutes.</a:t>
             </a:r>
           </a:p>
           <a:p>
@@ -883,12 +893,12 @@
           </a:p>
           <a:p>
             <a:r>
-              <a:t>below: same order, a little low, and payments a day is the factor to revisit. Praise structure, not</a:t>
-            </a:r>
-          </a:p>
-          <a:p>
-            <a:r>
-              <a:t>closeness.</a:t>
+              <a:t>below, a little low, and payments a day is the factor to revisit: the Rs 1,220 a payment says the</a:t>
+            </a:r>
+          </a:p>
+          <a:p>
+            <a:r>
+              <a:t>2 a day must split shops from people. Praise structure and the second check over closeness.</a:t>
             </a:r>
           </a:p>
           <a:p>
@@ -963,17 +973,17 @@
           <a:lstStyle/>
           <a:p>
             <a:r>
-              <a:t>LIVE, 6 minutes. Sources, all checked 12 October 2026: The Tribune (9 August 2026) and Republic</a:t>
-            </a:r>
-          </a:p>
-          <a:p>
-            <a:r>
-              <a:t>World (18 September 2026), both citing DMRC; Flipkart Stories (9 October 2026). In 2018 DMRC's</a:t>
-            </a:r>
-          </a:p>
-          <a:p>
-            <a:r>
-              <a:t>line-utilisation count tallied a trip across three lines three times (PTI, 30 May 2018).</a:t>
+              <a:t>LIVE, 6 minutes. Each trap fails one of the three tests on the board: unit, period, definition.</a:t>
+            </a:r>
+          </a:p>
+          <a:p>
+            <a:r>
+              <a:t>In 2018 DMRC's line-utilisation count tallied a trip across three lines three times (PTI, 30 May</a:t>
+            </a:r>
+          </a:p>
+          <a:p>
+            <a:r>
+              <a:t>2018), another definition trap.</a:t>
             </a:r>
           </a:p>
           <a:p>
@@ -1543,12 +1553,22 @@
           </a:p>
           <a:p>
             <a:r>
-              <a:t>the three follow-ups without notes. The weak opening reads nine numbers and lets the per-driver-week</a:t>
-            </a:r>
-          </a:p>
-          <a:p>
-            <a:r>
-              <a:t>rise blur the claim.</a:t>
+              <a:t>the three follow-ups without notes. The weak opening reads numbers and lets the per-driver-week rise</a:t>
+            </a:r>
+          </a:p>
+          <a:p>
+            <a:r>
+              <a:t>blur the claim. The full hire-grade answer, with the per-driver-week line checked (each driver</a:t>
+            </a:r>
+          </a:p>
+          <a:p>
+            <a:r>
+              <a:t>online four more hours a week at 17 percent less per hour; the 140 joiners pulled the read down), is</a:t>
+            </a:r>
+          </a:p>
+          <a:p>
+            <a:r>
+              <a:t>in extras/C2_W04_D02_interview_room_STUDENT.md.</a:t>
             </a:r>
           </a:p>
           <a:p>
@@ -1623,22 +1643,27 @@
           <a:lstStyle/>
           <a:p>
             <a:r>
-              <a:t>LIVE, 8 minutes. Hire-grade lines for the follow-ups: the share of online hours with no completed</a:t>
-            </a:r>
-          </a:p>
-          <a:p>
-            <a:r>
-              <a:t>trip, 0.22 before and 0.38 after; a four-hour window spreads the evening's 25,000 trips to about</a:t>
-            </a:r>
-          </a:p>
-          <a:p>
-            <a:r>
-              <a:t>6,250 an hour and about 4,300 drivers, unless the extra hour adds trips; about 2,900 to 8,600, set</a:t>
-            </a:r>
-          </a:p>
-          <a:p>
-            <a:r>
-              <a:t>by the share who ride.</a:t>
+              <a:t>LIVE, 8 minutes. Hire-grade lines for the follow-ups: the case's hours with no trip (22 and 38</a:t>
+            </a:r>
+          </a:p>
+          <a:p>
+            <a:r>
+              <a:t>percent) are looser than idle at a moment, and like for like its trips per hour give about 0.21</a:t>
+            </a:r>
+          </a:p>
+          <a:p>
+            <a:r>
+              <a:t>before the launch, which held the wait at 4.8 minutes and gives about 5,000; a four-hour window</a:t>
+            </a:r>
+          </a:p>
+          <a:p>
+            <a:r>
+              <a:t>leaves the busiest half hour where it was, so the buffer rises to about 1.53 and the answer stays</a:t>
+            </a:r>
+          </a:p>
+          <a:p>
+            <a:r>
+              <a:t>about 5,700; about 2,900 to 8,600 with everything else held, driven by trips per person.</a:t>
             </a:r>
           </a:p>
           <a:p>
@@ -1718,7 +1743,17 @@
           </a:p>
           <a:p>
             <a:r>
-              <a:t>both keep the visible number while the north star does the paying.</a:t>
+              <a:t>both keep the visible number while the north star does the judging. The study: Ziegler and</a:t>
+            </a:r>
+          </a:p>
+          <a:p>
+            <a:r>
+              <a:t>colleagues, arXiv 2205.06537, 13 May 2022 (checked 12 October 2026). A commit is a saved change to</a:t>
+            </a:r>
+          </a:p>
+          <a:p>
+            <a:r>
+              <a:t>the code; a revert undoes one.</a:t>
             </a:r>
           </a:p>
           <a:p>
@@ -2503,17 +2538,17 @@
           <a:lstStyle/>
           <a:p>
             <a:r>
-              <a:t>LIVE, 6 minutes. Build the tree on the board with the room, leaf by leaf, asking for each value.</a:t>
-            </a:r>
-          </a:p>
-          <a:p>
-            <a:r>
-              <a:t>Explorer scene T3 has a slider per leaf. The idle share's range, 0.22 to 0.38, is Monday's own</a:t>
-            </a:r>
-          </a:p>
-          <a:p>
-            <a:r>
-              <a:t>share of online hours with no completed trip, before and after.</a:t>
+              <a:t>LIVE, 6 minutes. Build the tree on the board with the room, leaf by leaf, asking for each value and</a:t>
+            </a:r>
+          </a:p>
+          <a:p>
+            <a:r>
+              <a:t>its range. Explorer scene T3 has a slider per leaf. The idle share is a guess here; the validate</a:t>
+            </a:r>
+          </a:p>
+          <a:p>
+            <a:r>
+              <a:t>step checks it like for like.</a:t>
             </a:r>
           </a:p>
           <a:p>
@@ -2593,7 +2628,12 @@
           </a:p>
           <a:p>
             <a:r>
-              <a:t>question: letters on paper, two minutes with a neighbour, revote.</a:t>
+              <a:t>question: letters on paper, two minutes with a neighbour, revote. A range that spans three times</a:t>
+            </a:r>
+          </a:p>
+          <a:p>
+            <a:r>
+              <a:t>its low end beats one that spans a fifth.</a:t>
             </a:r>
           </a:p>
           <a:p>
@@ -2668,17 +2708,12 @@
           <a:lstStyle/>
           <a:p>
             <a:r>
-              <a:t>LIVE, 5 minutes. The ride share is also the first number to replace: Uber's own dashboard holds</a:t>
-            </a:r>
-          </a:p>
-          <a:p>
-            <a:r>
-              <a:t>peak requests an hour. The idle share is the assumption Monday showed moving, 0.22 to 0.38 of</a:t>
-            </a:r>
-          </a:p>
-          <a:p>
-            <a:r>
-              <a:t>online hours with no trip in six weeks.</a:t>
+              <a:t>LIVE, 5 minutes. Trips per person is also the first number to replace: Uber's own dashboard holds</a:t>
+            </a:r>
+          </a:p>
+          <a:p>
+            <a:r>
+              <a:t>peak trips an hour. The idle share is the assumption Monday showed moving.</a:t>
             </a:r>
           </a:p>
           <a:p>
@@ -6383,7 +6418,7 @@
                 </a:solidFill>
                 <a:latin typeface="Georgia"/>
               </a:rPr>
-              <a:t>Validate: the case can check a ratio, never the count</a:t>
+              <a:t>Validate: like for like, the chain runs high</a:t>
             </a:r>
           </a:p>
         </p:txBody>
@@ -6418,7 +6453,7 @@
                 </a:solidFill>
                 <a:latin typeface="Calibri"/>
               </a:rPr>
-              <a:t>Which part of the estimate can the case's own data confirm?</a:t>
+              <a:t>Which part of the estimate can the case's own data confirm, and does it move the answer?</a:t>
             </a:r>
           </a:p>
         </p:txBody>
@@ -6453,7 +6488,7 @@
                 </a:solidFill>
                 <a:latin typeface="Georgia"/>
               </a:rPr>
-              <a:t>0.47</a:t>
+              <a:t>0.53</a:t>
             </a:r>
           </a:p>
         </p:txBody>
@@ -6488,7 +6523,7 @@
                 </a:solidFill>
                 <a:latin typeface="Calibri"/>
               </a:rPr>
-              <a:t>DRIVER-HOURS PER REQUEST, BEFORE</a:t>
+              <a:t>DRIVER-HOURS PER COMPLETED TRIP, BEFORE</a:t>
             </a:r>
           </a:p>
         </p:txBody>
@@ -6602,7 +6637,7 @@
                 </a:solidFill>
                 <a:latin typeface="Georgia"/>
               </a:rPr>
-              <a:t>0.57</a:t>
+              <a:t>0.63</a:t>
             </a:r>
           </a:p>
         </p:txBody>
@@ -6637,7 +6672,7 @@
                 </a:solidFill>
                 <a:latin typeface="Calibri"/>
               </a:rPr>
-              <a:t>DRIVER-HOURS PER REQUEST, AFTER</a:t>
+              <a:t>DRIVER-HOURS PER COMPLETED TRIP, AFTER</a:t>
             </a:r>
           </a:p>
         </p:txBody>
@@ -6821,7 +6856,7 @@
                 </a:solidFill>
                 <a:latin typeface="Calibri"/>
               </a:rPr>
-              <a:t>1 / 1.68, about a quarter above 0.47</a:t>
+              <a:t>1 / 1.68, about an eighth above 0.53</a:t>
             </a:r>
           </a:p>
         </p:txBody>
@@ -6879,7 +6914,7 @@
         <p:spPr>
           <a:xfrm>
             <a:off x="530352" y="3419856"/>
-            <a:ext cx="11130991" cy="1324864"/>
+            <a:ext cx="11130991" cy="1601216"/>
           </a:xfrm>
           <a:prstGeom prst="rect">
             <a:avLst/>
@@ -6904,7 +6939,7 @@
                 </a:solidFill>
                 <a:latin typeface="Calibri"/>
               </a:rPr>
-              <a:t>Monday's data counts peak hours on all seven days, two three-hour windows a day, 42 hours a week,</a:t>
+              <a:t>The chain needs about an eighth more driver time per trip than the before window, the one whose wait met the target, so it errs high.</a:t>
             </a:r>
             <a:r>
               <a:rPr sz="1600" b="0" i="0">
@@ -6913,7 +6948,7 @@
                 </a:solidFill>
                 <a:latin typeface="Calibri"/>
               </a:rPr>
-              <a:t> so its 256,556 after-window requests are about 1,018 an hour: a slice of the city run by 1,200 drivers, which can check the ratio and never the city's count. The published figure for Uber drivers online at Hyderabad's evening peak is to be found.</a:t>
+              <a:t> Re-run at the case's 1.90 trips an hour: 8,330 / 1.90 x 1.15 = about 5,000, so say about 5,000 to 5,700. The case pools both daily windows on all seven days (42 hours a week), so it checks the ratio's size, never the city's count, and a published count of drivers online at Hyderabad's evening peak has not been found.</a:t>
             </a:r>
           </a:p>
         </p:txBody>
@@ -7426,7 +7461,7 @@
                 </a:solidFill>
                 <a:latin typeface="Calibri"/>
               </a:rPr>
-              <a:t>What goes wrong when the units are not clarified?</a:t>
+              <a:t>What goes wrong when a day meets an hour?</a:t>
             </a:r>
           </a:p>
         </p:txBody>
@@ -7563,7 +7598,7 @@
                 </a:solidFill>
                 <a:latin typeface="Calibri"/>
               </a:rPr>
-              <a:t>"1 crore people, 1 percent ride, so 1 lakh trips; a driver does 2.4 trips an hour; so about 41,700 drivers." A city head who takes that to the review asks for incentives for about seven times the drivers the chain says.</a:t>
+              <a:t>"1 crore people, 1 trip per 100 people, so 1 lakh trips; a driver does 2.4 trips an hour; so about 41,700 drivers." A city head who takes that to the review asks for incentives for about seven times the drivers the chain says.</a:t>
             </a:r>
           </a:p>
         </p:txBody>
@@ -7700,7 +7735,7 @@
                 </a:solidFill>
                 <a:latin typeface="Calibri"/>
               </a:rPr>
-              <a:t>A day's trips were divided by an hour's trips per driver, and the idle share and the evening window were skipped. </a:t>
+              <a:t>A day's trips were divided by an hour's trips per driver, a period mismatch, and the idle share and the evening window were skipped. </a:t>
             </a:r>
             <a:r>
               <a:rPr sz="1500" b="1" i="0">
@@ -8263,7 +8298,7 @@
         <p:spPr>
           <a:xfrm>
             <a:off x="530352" y="1956816"/>
-            <a:ext cx="11130991" cy="807720"/>
+            <a:ext cx="11130991" cy="1074420"/>
           </a:xfrm>
           <a:prstGeom prst="roundRect">
             <a:avLst>
@@ -8311,7 +8346,7 @@
         <p:spPr>
           <a:xfrm>
             <a:off x="676656" y="2084832"/>
-            <a:ext cx="45720" cy="551688"/>
+            <a:ext cx="45720" cy="818388"/>
           </a:xfrm>
           <a:prstGeom prst="roundRect">
             <a:avLst>
@@ -8357,7 +8392,7 @@
         <p:spPr>
           <a:xfrm>
             <a:off x="877824" y="2075688"/>
-            <a:ext cx="10564063" cy="624840"/>
+            <a:ext cx="10564063" cy="891540"/>
           </a:xfrm>
           <a:prstGeom prst="rect">
             <a:avLst/>
@@ -8386,7 +8421,7 @@
                 </a:solidFill>
                 <a:latin typeface="Calibri"/>
               </a:rPr>
-              <a:t>In pairs, seven minutes, all four steps on one sheet. Clarify volume or value (volume: the count of payments). Map active users x payments per user a day, split between paying shops and paying people.</a:t>
+              <a:t>In pairs, seven minutes, all four steps on one sheet. Clarify volume or value (volume: the count of payments). Map active users x payments per user a day, and say how many of those go to shops and how many to people, so the payments a day are believable.</a:t>
             </a:r>
           </a:p>
         </p:txBody>
@@ -8399,7 +8434,7 @@
         </p:nvSpPr>
         <p:spPr>
           <a:xfrm>
-            <a:off x="530352" y="2929128"/>
+            <a:off x="530352" y="3195828"/>
             <a:ext cx="11130991" cy="807720"/>
           </a:xfrm>
           <a:prstGeom prst="roundRect">
@@ -8447,7 +8482,7 @@
         </p:nvSpPr>
         <p:spPr>
           <a:xfrm>
-            <a:off x="676656" y="3057144"/>
+            <a:off x="676656" y="3323844"/>
             <a:ext cx="45720" cy="551688"/>
           </a:xfrm>
           <a:prstGeom prst="roundRect">
@@ -8493,7 +8528,7 @@
         </p:nvSpPr>
         <p:spPr>
           <a:xfrm>
-            <a:off x="877824" y="3048000"/>
+            <a:off x="877824" y="3314700"/>
             <a:ext cx="10564063" cy="624840"/>
           </a:xfrm>
           <a:prstGeom prst="rect">
@@ -8523,7 +8558,7 @@
                 </a:solidFill>
                 <a:latin typeface="Calibri"/>
               </a:rPr>
-              <a:t>scope clarified first, every assumption written with a range, a range given, and a sanity check in the right unit. The final number scores nothing on its own.</a:t>
+              <a:t>scope clarified first, every assumption written with a range, a range given, and a sanity check in the right unit.</a:t>
             </a:r>
           </a:p>
         </p:txBody>
@@ -9001,7 +9036,7 @@
                 </a:solidFill>
                 <a:latin typeface="Georgia"/>
               </a:rPr>
-              <a:t>The check: 802 million a day, compared per day</a:t>
+              <a:t>The check: per day, and per payment</a:t>
             </a:r>
           </a:p>
         </p:txBody>
@@ -9043,7 +9078,7 @@
       </p:sp>
       <p:pic>
         <p:nvPicPr>
-          <p:cNvPr id="9" name="mermaid diagram" descr="29670b4455039910.png"/>
+          <p:cNvPr id="9" name="mermaid diagram" descr="63f7d2d06c8445ee.png"/>
           <p:cNvPicPr>
             <a:picLocks noChangeAspect="1"/>
           </p:cNvPicPr>
@@ -9074,7 +9109,7 @@
         <p:spPr>
           <a:xfrm>
             <a:off x="5761917" y="1956816"/>
-            <a:ext cx="5899425" cy="1341120"/>
+            <a:ext cx="5899425" cy="1607820"/>
           </a:xfrm>
           <a:prstGeom prst="roundRect">
             <a:avLst>
@@ -9122,7 +9157,7 @@
         <p:spPr>
           <a:xfrm>
             <a:off x="5908221" y="2084832"/>
-            <a:ext cx="45720" cy="1085088"/>
+            <a:ext cx="45720" cy="1351788"/>
           </a:xfrm>
           <a:prstGeom prst="roundRect">
             <a:avLst>
@@ -9168,7 +9203,7 @@
         <p:spPr>
           <a:xfrm>
             <a:off x="6109389" y="2075688"/>
-            <a:ext cx="5332497" cy="1158240"/>
+            <a:ext cx="5332497" cy="1424940"/>
           </a:xfrm>
           <a:prstGeom prst="rect">
             <a:avLst/>
@@ -9188,7 +9223,7 @@
                 </a:solidFill>
                 <a:latin typeface="Calibri"/>
               </a:rPr>
-              <a:t>NPCI's figure: </a:t>
+              <a:t>NPCI's figure. </a:t>
             </a:r>
             <a:r>
               <a:rPr sz="1500" b="0" i="0">
@@ -9197,7 +9232,7 @@
                 </a:solidFill>
                 <a:latin typeface="Calibri"/>
               </a:rPr>
-              <a:t>an average of 802 million UPI transactions a day in September 2026, and 24.07 billion in the month (Outlook Money, 2 October 2026, citing NPCI; checked 12 October 2026).</a:t>
+              <a:t>NPCI, the National Payments Corporation of India, which runs UPI, reported an average of 802 million UPI payments a day in September 2026: 24.07 billion in the month, worth Rs 29.37 lakh crore (Outlook Money, 2 October 2026; checked 12 October 2026).</a:t>
             </a:r>
           </a:p>
         </p:txBody>
@@ -9210,8 +9245,8 @@
         </p:nvSpPr>
         <p:spPr>
           <a:xfrm>
-            <a:off x="5761917" y="3462528"/>
-            <a:ext cx="5899425" cy="1341120"/>
+            <a:off x="5761917" y="3729228"/>
+            <a:ext cx="5899425" cy="1874519"/>
           </a:xfrm>
           <a:prstGeom prst="roundRect">
             <a:avLst>
@@ -9258,8 +9293,8 @@
         </p:nvSpPr>
         <p:spPr>
           <a:xfrm>
-            <a:off x="5908221" y="3590544"/>
-            <a:ext cx="45720" cy="1085088"/>
+            <a:off x="5908221" y="3857244"/>
+            <a:ext cx="45720" cy="1618487"/>
           </a:xfrm>
           <a:prstGeom prst="roundRect">
             <a:avLst>
@@ -9304,8 +9339,8 @@
         </p:nvSpPr>
         <p:spPr>
           <a:xfrm>
-            <a:off x="6109389" y="3581400"/>
-            <a:ext cx="5332497" cy="1158240"/>
+            <a:off x="6109389" y="3848100"/>
+            <a:ext cx="5332497" cy="1691639"/>
           </a:xfrm>
           <a:prstGeom prst="rect">
             <a:avLst/>
@@ -9325,7 +9360,7 @@
                 </a:solidFill>
                 <a:latin typeface="Calibri"/>
               </a:rPr>
-              <a:t>The catch. </a:t>
+              <a:t>Two checks. </a:t>
             </a:r>
             <a:r>
               <a:rPr sz="1500" b="0" i="0">
@@ -9334,7 +9369,7 @@
                 </a:solidFill>
                 <a:latin typeface="Calibri"/>
               </a:rPr>
-              <a:t>September has 30 days: 24.07 billion / 30 is 802 million, while dividing by 31 gives 776 million, about 3 percent low. Compare per-day figures in the unit the source published.</a:t>
+              <a:t>Per day: September has 30 days, so 24.07 billion / 30 = 802 million; dividing by 31 gives 776 million, a small slip beside the estimate's range. Per payment: Rs 29.37 lakh crore / 24.07 billion = about Rs 1,220 a payment, far above a cup of tea, so the count holds large transfers between people.</a:t>
             </a:r>
           </a:p>
         </p:txBody>
@@ -9862,7 +9897,7 @@
         </p:nvGraphicFramePr>
         <p:xfrm>
           <a:off x="530352" y="1956816"/>
-          <a:ext cx="11130990" cy="2170176"/>
+          <a:ext cx="11130989" cy="2377440"/>
         </p:xfrm>
         <a:graphic>
           <a:graphicData uri="http://schemas.openxmlformats.org/drawingml/2006/table">
@@ -9871,10 +9906,10 @@
                 <a:tableStyleId>{2D5ABB26-0587-4C30-8999-92F81FD0307C}</a:tableStyleId>
               </a:tblPr>
               <a:tblGrid>
-                <a:gridCol w="1271422"/>
-                <a:gridCol w="4118967"/>
-                <a:gridCol w="4118967"/>
-                <a:gridCol w="1621634"/>
+                <a:gridCol w="1232820"/>
+                <a:gridCol w="3818607"/>
+                <a:gridCol w="3818607"/>
+                <a:gridCol w="2260955"/>
               </a:tblGrid>
               <a:tr h="335280">
                 <a:tc>
@@ -9955,7 +9990,7 @@
                           </a:solidFill>
                           <a:latin typeface="Calibri"/>
                         </a:rPr>
-                        <a:t>The move skipped</a:t>
+                        <a:t>The test it fails</a:t>
                       </a:r>
                     </a:p>
                   </a:txBody>
@@ -9979,7 +10014,7 @@
                           </a:solidFill>
                           <a:latin typeface="Calibri"/>
                         </a:rPr>
-                        <a:t>Crowd as households</a:t>
+                        <a:t>People as households</a:t>
                       </a:r>
                     </a:p>
                   </a:txBody>
@@ -10001,7 +10036,7 @@
                           </a:solidFill>
                           <a:latin typeface="Calibri"/>
                         </a:rPr>
-                        <a:t>"A city of two million people has nine million households" (invented)</a:t>
+                        <a:t>"A city of two million people has eight million households" (invented)</a:t>
                       </a:r>
                     </a:p>
                   </a:txBody>
@@ -10023,7 +10058,7 @@
                           </a:solidFill>
                           <a:latin typeface="Calibri"/>
                         </a:rPr>
-                        <a:t>About four people to a household gives about 5 lakh households</a:t>
+                        <a:t>Households are people divided by about four: 20 lakh / 4 = 5 lakh; this one multiplied</a:t>
                       </a:r>
                     </a:p>
                   </a:txBody>
@@ -10045,7 +10080,7 @@
                           </a:solidFill>
                           <a:latin typeface="Calibri"/>
                         </a:rPr>
-                        <a:t>Clarify the unit</a:t>
+                        <a:t>Unit</a:t>
                       </a:r>
                     </a:p>
                   </a:txBody>
@@ -10069,7 +10104,7 @@
                           </a:solidFill>
                           <a:latin typeface="Calibri"/>
                         </a:rPr>
-                        <a:t>A different unit</a:t>
+                        <a:t>A record day</a:t>
                       </a:r>
                     </a:p>
                   </a:txBody>
@@ -10091,7 +10126,7 @@
                           </a:solidFill>
                           <a:latin typeface="Calibri"/>
                         </a:rPr>
-                        <a:t>A weekday estimate of Delhi Metro riders checked against a record day's boardings</a:t>
+                        <a:t>A weekday estimate of Delhi Metro journeys, checked against 82,44,903</a:t>
                       </a:r>
                     </a:p>
                   </a:txBody>
@@ -10113,7 +10148,7 @@
                           </a:solidFill>
                           <a:latin typeface="Calibri"/>
                         </a:rPr>
-                        <a:t>DMRC reports 64.06 lakh journeys a day and, separately, a record 82,44,903 boardings on 17 September 2026</a:t>
+                        <a:t>DMRC's average is 64.06 lakh journeys a day; 82,44,903 was one record day, 17 September 2026</a:t>
                       </a:r>
                     </a:p>
                   </a:txBody>
@@ -10135,7 +10170,7 @@
                           </a:solidFill>
                           <a:latin typeface="Calibri"/>
                         </a:rPr>
-                        <a:t>Validate in the same unit</a:t>
+                        <a:t>Period</a:t>
                       </a:r>
                     </a:p>
                   </a:txBody>
@@ -10146,7 +10181,7 @@
                   </a:tcPr>
                 </a:tc>
               </a:tr>
-              <a:tr h="542544">
+              <a:tr h="749808">
                 <a:tc>
                   <a:txBody>
                     <a:bodyPr/>
@@ -10159,7 +10194,7 @@
                           </a:solidFill>
                           <a:latin typeface="Calibri"/>
                         </a:rPr>
-                        <a:t>A decimal</a:t>
+                        <a:t>A muddled source</a:t>
                       </a:r>
                     </a:p>
                   </a:txBody>
@@ -10203,7 +10238,7 @@
                           </a:solidFill>
                           <a:latin typeface="Calibri"/>
                         </a:rPr>
-                        <a:t>Flipkart's own announcement of 9 October 2026 says 6.3 million; the 63 is in its URL</a:t>
+                        <a:t>Flipkart's text says 6.3 million (the 63 is in its web address), and "concurrent in a minute" mixes a moment with a minute</a:t>
                       </a:r>
                     </a:p>
                   </a:txBody>
@@ -10225,7 +10260,7 @@
                           </a:solidFill>
                           <a:latin typeface="Calibri"/>
                         </a:rPr>
-                        <a:t>Read the source's text</a:t>
+                        <a:t>Definition: read the source's own words</a:t>
                       </a:r>
                     </a:p>
                   </a:txBody>
@@ -10248,8 +10283,8 @@
         </p:nvSpPr>
         <p:spPr>
           <a:xfrm>
-            <a:off x="530352" y="4383024"/>
-            <a:ext cx="11130991" cy="495807"/>
+            <a:off x="530352" y="4590288"/>
+            <a:ext cx="11130991" cy="772160"/>
           </a:xfrm>
           <a:prstGeom prst="rect">
             <a:avLst/>
@@ -10274,7 +10309,7 @@
                 </a:solidFill>
                 <a:latin typeface="Calibri"/>
               </a:rPr>
-              <a:t>Each trap is one skipped step,</a:t>
+              <a:t>Sources,</a:t>
             </a:r>
             <a:r>
               <a:rPr sz="1600" b="0" i="0">
@@ -10283,7 +10318,7 @@
                 </a:solidFill>
                 <a:latin typeface="Calibri"/>
               </a:rPr>
-              <a:t> so the scorer names the step and the room fixes the habit.</a:t>
+              <a:t> checked 12 October 2026: The Tribune (9 August 2026) and Republic World (18 September 2026), citing DMRC, the Delhi Metro Rail Corporation; Flipkart Stories (9 October 2026).</a:t>
             </a:r>
           </a:p>
         </p:txBody>
@@ -10803,7 +10838,7 @@
       </p:sp>
       <p:pic>
         <p:nvPicPr>
-          <p:cNvPr id="9" name="mermaid diagram" descr="d33e80112993a4e1.png"/>
+          <p:cNvPr id="9" name="mermaid diagram" descr="0adedbda7aa3dede.png"/>
           <p:cNvPicPr>
             <a:picLocks noChangeAspect="1"/>
           </p:cNvPicPr>
@@ -10834,7 +10869,7 @@
         <p:spPr>
           <a:xfrm>
             <a:off x="530352" y="3960495"/>
-            <a:ext cx="11130991" cy="1048512"/>
+            <a:ext cx="11130991" cy="1324864"/>
           </a:xfrm>
           <a:prstGeom prst="rect">
             <a:avLst/>
@@ -10868,7 +10903,7 @@
                 </a:solidFill>
                 <a:latin typeface="Calibri"/>
               </a:rPr>
-              <a:t> the slide (Rs 314 to Rs 260 per online hour, defended in four moves, one appendix page per role) and the estimate (about 5,700 drivers, between 2,900 and 8,600). </a:t>
+              <a:t> the slide (Rs 314 to Rs 260 per online hour, defended in four moves, one appendix page per role) and the estimate (about 5,000 to 5,700 drivers once checked; 2,900 to 8,600 by how often people ride). </a:t>
             </a:r>
             <a:r>
               <a:rPr sz="1600" b="1" i="0">
@@ -10886,7 +10921,7 @@
                 </a:solidFill>
                 <a:latin typeface="Calibri"/>
               </a:rPr>
-              <a:t> [S]: estimate a number from nothing, aloud, and check it. The structure and the sanity check carry the score.</a:t>
+              <a:t> [S]: estimate a number from nothing, aloud, and check it. The structure, the stated assumptions and the check carry most of the score.</a:t>
             </a:r>
           </a:p>
         </p:txBody>
@@ -12866,7 +12901,7 @@
                 </a:solidFill>
                 <a:latin typeface="Calibri"/>
               </a:rPr>
-              <a:t> is the city head, with the three roles reading over a shoulder: finance reads rupees, driver operations reads drivers, marketing reads sign-ups. Words a non-technical reader would not know (denominator, ratio of sums, regression) stay off the page.</a:t>
+              <a:t> is the city head, with the three roles reading over a shoulder: finance reads rupees, driver operations reads drivers, marketing reads sign-ups. Words a non-technical reader would not know (denominator, index, guardrail) stay off the page, or are said in plain words.</a:t>
             </a:r>
           </a:p>
         </p:txBody>
@@ -14588,7 +14623,7 @@
                 </a:solidFill>
                 <a:latin typeface="Calibri"/>
               </a:rPr>
-              <a:t>You have sized drivers online at the weekday evening peak. Which of these numbers checks it?</a:t>
+              <a:t>You have sized drivers online at the weekday evening peak. Which of these numbers checks it in the same unit, period and definition?</a:t>
             </a:r>
           </a:p>
         </p:txBody>
@@ -15202,8 +15237,8 @@
           <p:nvPr/>
         </p:nvGraphicFramePr>
         <p:xfrm>
-          <a:off x="530352" y="1956816"/>
-          <a:ext cx="11130990" cy="2190496"/>
+          <a:off x="530352" y="1938782"/>
+          <a:ext cx="11130990" cy="2674112"/>
         </p:xfrm>
         <a:graphic>
           <a:graphicData uri="http://schemas.openxmlformats.org/drawingml/2006/table">
@@ -15261,7 +15296,7 @@
                   </a:tcPr>
                 </a:tc>
               </a:tr>
-              <a:tr h="1820672">
+              <a:tr h="2304288">
                 <a:tc>
                   <a:txBody>
                     <a:bodyPr/>
@@ -15296,7 +15331,7 @@
                           </a:solidFill>
                           <a:latin typeface="Calibri"/>
                         </a:rPr>
-                        <a:t>"The scheme is paying for online hours that carry no trips. An hour online used to bring in Rs 314 of fares and now brings in Rs 260 at the same fare. Part of that may be the monsoon. Paying per completed trip with an acceptance floor returns Rs 58 lakh to Rs 92.7 lakh over six weeks depending on whether half or a fifth of idle drivers start accepting."</a:t>
+                        <a:t>"You are deciding whether to keep, end or change the guarantee. It is paying for online hours that carry no trips: an hour online brought in Rs 314 of fares and now brings in Rs 260 at the same fare, while the median wait barely moved, 4.8 to 4.6 minutes. Part of the fall may be the monsoon. Test paying per completed trip with an acceptance floor on half the drivers, picked at random, for six weeks; city-wide it saves Rs 58 lakh to Rs 92.7 lakh. You sign the test."</a:t>
                       </a:r>
                     </a:p>
                   </a:txBody>
@@ -15319,7 +15354,7 @@
         </p:nvSpPr>
         <p:spPr>
           <a:xfrm>
-            <a:off x="530352" y="4403344"/>
+            <a:off x="530352" y="4868926"/>
             <a:ext cx="11130991" cy="1074420"/>
           </a:xfrm>
           <a:prstGeom prst="roundRect">
@@ -15367,7 +15402,7 @@
         </p:nvSpPr>
         <p:spPr>
           <a:xfrm>
-            <a:off x="676656" y="4531360"/>
+            <a:off x="676656" y="4996942"/>
             <a:ext cx="45720" cy="818388"/>
           </a:xfrm>
           <a:prstGeom prst="roundRect">
@@ -15413,7 +15448,7 @@
         </p:nvSpPr>
         <p:spPr>
           <a:xfrm>
-            <a:off x="877824" y="4522216"/>
+            <a:off x="877824" y="4987798"/>
             <a:ext cx="10564063" cy="891540"/>
           </a:xfrm>
           <a:prstGeom prst="rect">
@@ -15443,7 +15478,7 @@
                 </a:solidFill>
                 <a:latin typeface="Calibri"/>
               </a:rPr>
-              <a:t>what is the one caveat you would say before anyone decides; which denominator did you choose, and what would make you choose another; the finance partner says it is the monsoon, so answer in under a minute.</a:t>
+              <a:t>which denominator did you choose, and what would make you choose another; test or rollout, and how do you stop drivers moving into the zones you treat; the finance partner says it is the monsoon, so answer in under a minute.</a:t>
             </a:r>
           </a:p>
         </p:txBody>
@@ -15971,7 +16006,7 @@
         </p:nvGraphicFramePr>
         <p:xfrm>
           <a:off x="530352" y="1956816"/>
-          <a:ext cx="11130990" cy="2190496"/>
+          <a:ext cx="11130990" cy="2674112"/>
         </p:xfrm>
         <a:graphic>
           <a:graphicData uri="http://schemas.openxmlformats.org/drawingml/2006/table">
@@ -16029,7 +16064,7 @@
                   </a:tcPr>
                 </a:tc>
               </a:tr>
-              <a:tr h="1820672">
+              <a:tr h="2304288">
                 <a:tc>
                   <a:txBody>
                     <a:bodyPr/>
@@ -16064,7 +16099,7 @@
                           </a:solidFill>
                           <a:latin typeface="Calibri"/>
                         </a:rPr>
-                        <a:t>"One moment of the three-hour weekday evening peak, Uber only, median wait under five minutes. Requests an hour times the trips one online driver completes, times a buffer: about 8,300 / 1.68 x 1.15, about 5,700, between 2,900 and 8,600, set mostly by the share who ride. The case's own 0.47 driver-hours per request says the chain is a little generous."</a:t>
+                        <a:t>"One moment of the three-hour weekday evening peak, one product, the city's median wait under five minutes. Drivers online is trips an hour divided by the trips one online driver completes in an hour, times a buffer: 8,330 / 1.68 x 1.15, about 5,700; trips per person moves it most, 2,900 to 8,600. Like for like, the case's 0.53 driver-hours per trip against my 0.60 says I run an eighth high, so 5,000 to 5,700, and each thousand idle drivers costs up to Rs 9 lakh an evening at the floor."</a:t>
                       </a:r>
                     </a:p>
                   </a:txBody>
@@ -16087,7 +16122,7 @@
         </p:nvSpPr>
         <p:spPr>
           <a:xfrm>
-            <a:off x="530352" y="4403344"/>
+            <a:off x="530352" y="4886960"/>
             <a:ext cx="11130991" cy="807720"/>
           </a:xfrm>
           <a:prstGeom prst="roundRect">
@@ -16135,7 +16170,7 @@
         </p:nvSpPr>
         <p:spPr>
           <a:xfrm>
-            <a:off x="676656" y="4531360"/>
+            <a:off x="676656" y="5014976"/>
             <a:ext cx="45720" cy="551688"/>
           </a:xfrm>
           <a:prstGeom prst="roundRect">
@@ -16181,7 +16216,7 @@
         </p:nvSpPr>
         <p:spPr>
           <a:xfrm>
-            <a:off x="877824" y="4522216"/>
+            <a:off x="877824" y="5005832"/>
             <a:ext cx="10564063" cy="624840"/>
           </a:xfrm>
           <a:prstGeom prst="rect">
@@ -16738,7 +16773,7 @@
         <p:spPr>
           <a:xfrm>
             <a:off x="530352" y="1956816"/>
-            <a:ext cx="11130991" cy="1074420"/>
+            <a:ext cx="11130991" cy="1607820"/>
           </a:xfrm>
           <a:prstGeom prst="roundRect">
             <a:avLst>
@@ -16786,7 +16821,7 @@
         <p:spPr>
           <a:xfrm>
             <a:off x="676656" y="2084832"/>
-            <a:ext cx="45720" cy="818388"/>
+            <a:ext cx="45720" cy="1351788"/>
           </a:xfrm>
           <a:prstGeom prst="roundRect">
             <a:avLst>
@@ -16832,7 +16867,7 @@
         <p:spPr>
           <a:xfrm>
             <a:off x="877824" y="2075688"/>
-            <a:ext cx="10564063" cy="891540"/>
+            <a:ext cx="10564063" cy="1424940"/>
           </a:xfrm>
           <a:prstGeom prst="rect">
             <a:avLst/>
@@ -16861,7 +16896,43 @@
                 </a:solidFill>
                 <a:latin typeface="Calibri"/>
               </a:rPr>
-              <a:t>A coding assistant's sales deck quotes "acceptance rate 32 percent", the share of suggestions developers accept. The analyst proposes a new north star: suggested text still present at the next commit, per active developer-week, with build failures and revert rate as guardrails.</a:t>
+              <a:t>A coding assistant's sales deck quotes "acceptance rate 32 percent", the share of suggestions developers accept, even ones deleted soon after. The analyst proposes a new </a:t>
+            </a:r>
+            <a:r>
+              <a:rPr sz="1500" b="1" i="0">
+                <a:solidFill>
+                  <a:srgbClr val="1A1440"/>
+                </a:solidFill>
+                <a:latin typeface="Calibri"/>
+              </a:rPr>
+              <a:t>north star</a:t>
+            </a:r>
+            <a:r>
+              <a:rPr sz="1500" b="0" i="0">
+                <a:solidFill>
+                  <a:srgbClr val="1A1440"/>
+                </a:solidFill>
+                <a:latin typeface="Calibri"/>
+              </a:rPr>
+              <a:t>, the one number the team is judged on: characters of suggested code still in the file seven days after acceptance, per developer who saw a suggestion that week, with two </a:t>
+            </a:r>
+            <a:r>
+              <a:rPr sz="1500" b="1" i="0">
+                <a:solidFill>
+                  <a:srgbClr val="1A1440"/>
+                </a:solidFill>
+                <a:latin typeface="Calibri"/>
+              </a:rPr>
+              <a:t>guardrails</a:t>
+            </a:r>
+            <a:r>
+              <a:rPr sz="1500" b="0" i="0">
+                <a:solidFill>
+                  <a:srgbClr val="1A1440"/>
+                </a:solidFill>
+                <a:latin typeface="Calibri"/>
+              </a:rPr>
+              <a:t> that catch padding (retained characters per accepted character; edits per accepted suggestion).</a:t>
             </a:r>
           </a:p>
         </p:txBody>
@@ -16874,8 +16945,8 @@
         </p:nvSpPr>
         <p:spPr>
           <a:xfrm>
-            <a:off x="530352" y="3195828"/>
-            <a:ext cx="11130991" cy="1074420"/>
+            <a:off x="530352" y="3729228"/>
+            <a:ext cx="11130991" cy="1341120"/>
           </a:xfrm>
           <a:prstGeom prst="roundRect">
             <a:avLst>
@@ -16922,8 +16993,8 @@
         </p:nvSpPr>
         <p:spPr>
           <a:xfrm>
-            <a:off x="676656" y="3323844"/>
-            <a:ext cx="45720" cy="818388"/>
+            <a:off x="676656" y="3857244"/>
+            <a:ext cx="45720" cy="1085088"/>
           </a:xfrm>
           <a:prstGeom prst="roundRect">
             <a:avLst>
@@ -16968,8 +17039,8 @@
         </p:nvSpPr>
         <p:spPr>
           <a:xfrm>
-            <a:off x="877824" y="3314700"/>
-            <a:ext cx="10564063" cy="891540"/>
+            <a:off x="877824" y="3848100"/>
+            <a:ext cx="10564063" cy="1158240"/>
           </a:xfrm>
           <a:prstGeom prst="rect">
             <a:avLst/>
@@ -16998,7 +17069,7 @@
                 </a:solidFill>
                 <a:latin typeface="Calibri"/>
               </a:rPr>
-              <a:t>"Acceptance rate is what customers see in the deck." True: customers do see it. </a:t>
+              <a:t>"Acceptance rate is what customers see." True, and a 2022 study of GitHub Copilot's users found acceptance tracks how productive developers feel. </a:t>
             </a:r>
             <a:r>
               <a:rPr sz="1500" b="1" i="0">
@@ -17016,7 +17087,25 @@
                 </a:solidFill>
                 <a:latin typeface="Calibri"/>
               </a:rPr>
-              <a:t> keeps acceptance as a leading input on the dashboard and in the deck, and pays the team for text that survives, because a suggestion accepted and then deleted counts as accepted.</a:t>
+              <a:t> keeps acceptance in the deck as a </a:t>
+            </a:r>
+            <a:r>
+              <a:rPr sz="1500" b="1" i="0">
+                <a:solidFill>
+                  <a:srgbClr val="1A1440"/>
+                </a:solidFill>
+                <a:latin typeface="Calibri"/>
+              </a:rPr>
+              <a:t>leading input</a:t>
+            </a:r>
+            <a:r>
+              <a:rPr sz="1500" b="0" i="0">
+                <a:solidFill>
+                  <a:srgbClr val="1A1440"/>
+                </a:solidFill>
+                <a:latin typeface="Calibri"/>
+              </a:rPr>
+              <a:t>, a number that moves first, and judges the team on code that survives only once a holdout of users shows it tracks seat renewals.</a:t>
             </a:r>
           </a:p>
         </p:txBody>
@@ -17553,10 +17642,10 @@
                 <a:tableStyleId>{2D5ABB26-0587-4C30-8999-92F81FD0307C}</a:tableStyleId>
               </a:tblPr>
               <a:tblGrid>
-                <a:gridCol w="4067531"/>
-                <a:gridCol w="1550404"/>
-                <a:gridCol w="2074805"/>
-                <a:gridCol w="3438249"/>
+                <a:gridCol w="4890706"/>
+                <a:gridCol w="1369720"/>
+                <a:gridCol w="1833007"/>
+                <a:gridCol w="3037556"/>
               </a:tblGrid>
               <a:tr h="335280">
                 <a:tc>
@@ -17751,7 +17840,7 @@
                           </a:solidFill>
                           <a:latin typeface="Calibri"/>
                         </a:rPr>
-                        <a:t>Named the denominator and the window</a:t>
+                        <a:t>Named the denominator, or the unit, and the window</a:t>
                       </a:r>
                     </a:p>
                   </a:txBody>
@@ -18968,7 +19057,7 @@
                           </a:solidFill>
                           <a:latin typeface="Calibri"/>
                         </a:rPr>
-                        <a:t>A check in a different unit</a:t>
+                        <a:t>A check against an unusual day</a:t>
                       </a:r>
                     </a:p>
                   </a:txBody>
@@ -18990,7 +19079,7 @@
                           </a:solidFill>
                           <a:latin typeface="Calibri"/>
                         </a:rPr>
-                        <a:t>Delhi Metro's journeys against its boardings</a:t>
+                        <a:t>Delhi Metro's average day against one record day</a:t>
                       </a:r>
                     </a:p>
                   </a:txBody>
@@ -19014,7 +19103,7 @@
                           </a:solidFill>
                           <a:latin typeface="Calibri"/>
                         </a:rPr>
-                        <a:t>A decimal slip in a published figure</a:t>
+                        <a:t>A muddled published figure</a:t>
                       </a:r>
                     </a:p>
                   </a:txBody>
@@ -19036,7 +19125,7 @@
                           </a:solidFill>
                           <a:latin typeface="Calibri"/>
                         </a:rPr>
-                        <a:t>Flipkart's 6.3 million against the 63 in its URL</a:t>
+                        <a:t>Flipkart's 6.3 million against the 63 in its web address</a:t>
                       </a:r>
                     </a:p>
                   </a:txBody>
@@ -19678,7 +19767,7 @@
                 </a:solidFill>
                 <a:latin typeface="Calibri"/>
               </a:rPr>
-              <a:t> is the Big Idea from Storytelling with Data: one complete sentence that carries a point of view and says what is at stake (checked 12 October 2026).</a:t>
+              <a:t> is the Big Idea from Storytelling with Data, a site on presenting data: one complete sentence that carries a point of view and says what is at stake (checked 12 October 2026).</a:t>
             </a:r>
           </a:p>
         </p:txBody>
@@ -21465,7 +21554,7 @@
                 </a:solidFill>
                 <a:latin typeface="Georgia"/>
               </a:rPr>
-              <a:t>"The scheme is paying for online hours that carry no trips: Rs 314 to Rs 260 per peak online hour at a flat Rs 165 fare. Part of it may be the monsoon. Pay per completed peak trip with an acceptance floor, which returns Rs 58 lakh to Rs 92.7 lakh over six weeks depending on whether half or a fifth of idle drivers start accepting. At the evening peak the city needs about 5,700 drivers online, between 2,900 and 8,600."</a:t>
+              <a:t>"The scheme is paying for online hours that carry no trips: Rs 314 to Rs 260 per peak online hour at a flat Rs 165 fare. Part of it may be the monsoon. Test paying per completed peak trip with an acceptance floor: city-wide, it saves Rs 58 lakh to Rs 92.7 lakh over six weeks if a half to a fifth of the idle drivers' top-up is still paid. At the evening peak the city needs about 5,000 to 5,700 drivers online, and how often people ride could move that from 2,900 to 8,600."</a:t>
             </a:r>
           </a:p>
         </p:txBody>
@@ -21479,7 +21568,7 @@
         <p:spPr>
           <a:xfrm>
             <a:off x="530352" y="3708400"/>
-            <a:ext cx="11130991" cy="1074420"/>
+            <a:ext cx="11130991" cy="1341120"/>
           </a:xfrm>
           <a:prstGeom prst="roundRect">
             <a:avLst>
@@ -21527,7 +21616,7 @@
         <p:spPr>
           <a:xfrm>
             <a:off x="676656" y="3836416"/>
-            <a:ext cx="45720" cy="818388"/>
+            <a:ext cx="45720" cy="1085088"/>
           </a:xfrm>
           <a:prstGeom prst="roundRect">
             <a:avLst>
@@ -21573,7 +21662,7 @@
         <p:spPr>
           <a:xfrm>
             <a:off x="877824" y="3827272"/>
-            <a:ext cx="10564063" cy="891540"/>
+            <a:ext cx="10564063" cy="1158240"/>
           </a:xfrm>
           <a:prstGeom prst="rect">
             <a:avLst/>
@@ -21602,7 +21691,7 @@
                 </a:solidFill>
                 <a:latin typeface="Calibri"/>
               </a:rPr>
-              <a:t>A slide carries one claim, one number with its denominator, the caveat in sight and the action with its cost. Name the denominator before the number. Answer an objection in four moves. Size a number in four steps and give the factor that drives the range. Check in the same unit, period and definition.</a:t>
+              <a:t>A slide carries one claim, one number with its denominator, the caveat in sight and the action with its cost. Name the denominator before the number. Answer an objection in four moves. Size a number in four steps, give the factor that drives the range, and check it like for like. Check in the same unit, period and definition.</a:t>
             </a:r>
           </a:p>
         </p:txBody>
@@ -21615,7 +21704,7 @@
         </p:nvSpPr>
         <p:spPr>
           <a:xfrm>
-            <a:off x="530352" y="4947412"/>
+            <a:off x="530352" y="5214112"/>
             <a:ext cx="11130991" cy="541020"/>
           </a:xfrm>
           <a:prstGeom prst="roundRect">
@@ -21663,7 +21752,7 @@
         </p:nvSpPr>
         <p:spPr>
           <a:xfrm>
-            <a:off x="676656" y="5075427"/>
+            <a:off x="676656" y="5342128"/>
             <a:ext cx="45720" cy="284988"/>
           </a:xfrm>
           <a:prstGeom prst="roundRect">
@@ -21709,7 +21798,7 @@
         </p:nvSpPr>
         <p:spPr>
           <a:xfrm>
-            <a:off x="877824" y="5066283"/>
+            <a:off x="877824" y="5332984"/>
             <a:ext cx="10564063" cy="358140"/>
           </a:xfrm>
           <a:prstGeom prst="rect">
@@ -22265,8 +22354,8 @@
         </p:nvSpPr>
         <p:spPr>
           <a:xfrm>
-            <a:off x="530352" y="1956816"/>
-            <a:ext cx="11130991" cy="1324864"/>
+            <a:off x="530352" y="1915667"/>
+            <a:ext cx="11130991" cy="1601216"/>
           </a:xfrm>
           <a:prstGeom prst="rect">
             <a:avLst/>
@@ -22300,14 +22389,14 @@
                 </a:solidFill>
                 <a:latin typeface="Calibri"/>
               </a:rPr>
-              <a:t> a is a six-week total for the twelve zones the enrolled drivers work, a different period and a smaller area. b counts sign-ups, a different definition from drivers online at one moment. d checks one link in the chain, the ratio, and that is the check the afternoon uses.</a:t>
+              <a:t> a counts rider requests over six weeks in twelve zones: another unit, a longer period and a slice of the city. b counts sign-ups, another definition from drivers online at one moment. d is not wrong: it checks one link in the chain, a ratio the case's own data holds, and when the direct check does not exist that is the honest fallback the afternoon uses.</a:t>
             </a:r>
           </a:p>
         </p:txBody>
       </p:sp>
       <p:pic>
         <p:nvPicPr>
-          <p:cNvPr id="10" name="mermaid diagram" descr="7fa94f507106ecf8.png"/>
+          <p:cNvPr id="10" name="mermaid diagram" descr="06bd107ab603f76c.png"/>
           <p:cNvPicPr>
             <a:picLocks noChangeAspect="1"/>
           </p:cNvPicPr>
@@ -22321,8 +22410,8 @@
         </p:blipFill>
         <p:spPr>
           <a:xfrm>
-            <a:off x="530352" y="3409696"/>
-            <a:ext cx="11130991" cy="2330358"/>
+            <a:off x="530352" y="3644899"/>
+            <a:ext cx="11130991" cy="2321562"/>
           </a:xfrm>
           <a:prstGeom prst="rect">
             <a:avLst/>
@@ -23549,7 +23638,7 @@
         <p:spPr>
           <a:xfrm>
             <a:off x="530352" y="4203382"/>
-            <a:ext cx="11130991" cy="1048512"/>
+            <a:ext cx="11130991" cy="1324864"/>
           </a:xfrm>
           <a:prstGeom prst="rect">
             <a:avLst/>
@@ -23574,7 +23663,7 @@
                 </a:solidFill>
                 <a:latin typeface="Calibri"/>
               </a:rPr>
-              <a:t>Interviewers score the structure and the sanity check, and hardly ever the final number.</a:t>
+              <a:t>Interviewers listen to the structure and the stated assumptions.</a:t>
             </a:r>
             <a:r>
               <a:rPr sz="1600" b="0" i="0">
@@ -23583,7 +23672,7 @@
                 </a:solidFill>
                 <a:latin typeface="Calibri"/>
               </a:rPr>
-              <a:t> Aced's analyst guide says the interviewer is evaluating the estimation framework and wants each assumption stated so it can be challenged (checked 12 October 2026).</a:t>
+              <a:t> Aced's guide to analyst interviews (an interview-preparation site) says the interviewer "isn't looking for a precise number" and is "evaluating your estimation framework", with each assumption stated so it can be challenged (checked 12 October 2026). A number that is wildly off still costs the answer, which is why step 4 exists.</a:t>
             </a:r>
           </a:p>
         </p:txBody>
@@ -24061,7 +24150,7 @@
                 </a:solidFill>
                 <a:latin typeface="Georgia"/>
               </a:rPr>
-              <a:t>Clarify: five questions pin the estimate down</a:t>
+              <a:t>Clarify: six questions pin the estimate down</a:t>
             </a:r>
           </a:p>
         </p:txBody>
@@ -24110,8 +24199,8 @@
           <p:nvPr/>
         </p:nvGraphicFramePr>
         <p:xfrm>
-          <a:off x="530352" y="1956816"/>
-          <a:ext cx="11130990" cy="2460752"/>
+          <a:off x="530352" y="1872996"/>
+          <a:ext cx="11130990" cy="3072384"/>
         </p:xfrm>
         <a:graphic>
           <a:graphicData uri="http://schemas.openxmlformats.org/drawingml/2006/table">
@@ -24120,8 +24209,8 @@
                 <a:tableStyleId>{2D5ABB26-0587-4C30-8999-92F81FD0307C}</a:tableStyleId>
               </a:tblPr>
               <a:tblGrid>
-                <a:gridCol w="3006662"/>
-                <a:gridCol w="8124328"/>
+                <a:gridCol w="3555158"/>
+                <a:gridCol w="7575832"/>
               </a:tblGrid>
               <a:tr h="369824">
                 <a:tc>
@@ -24182,7 +24271,7 @@
                           </a:solidFill>
                           <a:latin typeface="Calibri"/>
                         </a:rPr>
-                        <a:t>Which city?</a:t>
+                        <a:t>Which city, which product?</a:t>
                       </a:r>
                     </a:p>
                   </a:txBody>
@@ -24204,7 +24293,7 @@
                           </a:solidFill>
                           <a:latin typeface="Calibri"/>
                         </a:rPr>
-                        <a:t>The Hyderabad metro area, Uber only</a:t>
+                        <a:t>The Hyderabad metro area, Uber, one product (assume cars)</a:t>
                       </a:r>
                     </a:p>
                   </a:txBody>
@@ -24215,7 +24304,7 @@
                   </a:tcPr>
                 </a:tc>
               </a:tr>
-              <a:tr h="369824">
+              <a:tr h="611632">
                 <a:tc>
                   <a:txBody>
                     <a:bodyPr/>
@@ -24250,7 +24339,7 @@
                           </a:solidFill>
                           <a:latin typeface="Calibri"/>
                         </a:rPr>
-                        <a:t>The weekday evening peak, three hours long</a:t>
+                        <a:t>The weekday evening peak, one of the guarantee's two daily windows, three hours long</a:t>
                       </a:r>
                     </a:p>
                   </a:txBody>
@@ -24342,7 +24431,7 @@
                           </a:solidFill>
                           <a:latin typeface="Calibri"/>
                         </a:rPr>
-                        <a:t>A median rider wait under five minutes</a:t>
+                        <a:t>A median rider wait under five minutes, for the city and then zone by zone</a:t>
                       </a:r>
                     </a:p>
                   </a:txBody>
@@ -24388,7 +24477,7 @@
                           </a:solidFill>
                           <a:latin typeface="Calibri"/>
                         </a:rPr>
-                        <a:t>Rider requests, each one a trip to serve</a:t>
+                        <a:t>Trips: about nine in ten requests became trips in Monday's data</a:t>
                       </a:r>
                     </a:p>
                   </a:txBody>
@@ -24399,6 +24488,52 @@
                   </a:tcPr>
                 </a:tc>
               </a:tr>
+              <a:tr h="369824">
+                <a:tc>
+                  <a:txBody>
+                    <a:bodyPr/>
+                    <a:lstStyle/>
+                    <a:p>
+                      <a:r>
+                        <a:rPr sz="1400" b="0" i="0">
+                          <a:solidFill>
+                            <a:srgbClr val="1A1440"/>
+                          </a:solidFill>
+                          <a:latin typeface="Calibri"/>
+                        </a:rPr>
+                        <a:t>Drivers on two apps?</a:t>
+                      </a:r>
+                    </a:p>
+                  </a:txBody>
+                  <a:tcPr marL="101600" marR="101600" marT="38100" marB="38100" anchor="ctr">
+                    <a:solidFill>
+                      <a:srgbClr val="F4F2FA"/>
+                    </a:solidFill>
+                  </a:tcPr>
+                </a:tc>
+                <a:tc>
+                  <a:txBody>
+                    <a:bodyPr/>
+                    <a:lstStyle/>
+                    <a:p>
+                      <a:r>
+                        <a:rPr sz="1400" b="0" i="0">
+                          <a:solidFill>
+                            <a:srgbClr val="1A1440"/>
+                          </a:solidFill>
+                          <a:latin typeface="Calibri"/>
+                        </a:rPr>
+                        <a:t>A driver online on Uber may be busy on another app, so lean the idle share low</a:t>
+                      </a:r>
+                    </a:p>
+                  </a:txBody>
+                  <a:tcPr marL="101600" marR="101600" marT="38100" marB="38100" anchor="ctr">
+                    <a:solidFill>
+                      <a:srgbClr val="F4F2FA"/>
+                    </a:solidFill>
+                  </a:tcPr>
+                </a:tc>
+              </a:tr>
             </a:tbl>
           </a:graphicData>
         </a:graphic>
@@ -24411,7 +24546,7 @@
         </p:nvSpPr>
         <p:spPr>
           <a:xfrm>
-            <a:off x="530352" y="4673600"/>
+            <a:off x="530352" y="5201412"/>
             <a:ext cx="11130991" cy="807720"/>
           </a:xfrm>
           <a:prstGeom prst="roundRect">
@@ -24459,7 +24594,7 @@
         </p:nvSpPr>
         <p:spPr>
           <a:xfrm>
-            <a:off x="676656" y="4801616"/>
+            <a:off x="676656" y="5329428"/>
             <a:ext cx="45720" cy="551688"/>
           </a:xfrm>
           <a:prstGeom prst="roundRect">
@@ -24505,7 +24640,7 @@
         </p:nvSpPr>
         <p:spPr>
           <a:xfrm>
-            <a:off x="877824" y="4792472"/>
+            <a:off x="877824" y="5320284"/>
             <a:ext cx="10564063" cy="624840"/>
           </a:xfrm>
           <a:prstGeom prst="rect">
@@ -25055,7 +25190,7 @@
       </p:sp>
       <p:pic>
         <p:nvPicPr>
-          <p:cNvPr id="9" name="mermaid diagram" descr="803fa967d70fa5f8.png"/>
+          <p:cNvPr id="9" name="mermaid diagram" descr="e8976657129ef733.png"/>
           <p:cNvPicPr>
             <a:picLocks noChangeAspect="1"/>
           </p:cNvPicPr>
@@ -25069,8 +25204,8 @@
         </p:blipFill>
         <p:spPr>
           <a:xfrm>
-            <a:off x="1115415" y="1664208"/>
-            <a:ext cx="9960864" cy="3532632"/>
+            <a:off x="1905721" y="1664208"/>
+            <a:ext cx="8380251" cy="3256280"/>
           </a:xfrm>
           <a:prstGeom prst="rect">
             <a:avLst/>
@@ -25085,8 +25220,8 @@
         </p:nvSpPr>
         <p:spPr>
           <a:xfrm>
-            <a:off x="530352" y="5242560"/>
-            <a:ext cx="11130991" cy="957072"/>
+            <a:off x="530352" y="4966208"/>
+            <a:ext cx="11130991" cy="1233424"/>
           </a:xfrm>
           <a:prstGeom prst="rect">
             <a:avLst/>
@@ -25106,7 +25241,7 @@
                 </a:solidFill>
                 <a:latin typeface="Calibri"/>
               </a:rPr>
-              <a:t>Drivers online = requests an hour / trips per online driver-hour x buffer.</a:t>
+              <a:t>Drivers online = (trips to serve an hour / trips per online driver-hour) x buffer.</a:t>
             </a:r>
             <a:r>
               <a:rPr sz="1600" b="0" i="0">
@@ -25115,7 +25250,7 @@
                 </a:solidFill>
                 <a:latin typeface="Calibri"/>
               </a:rPr>
-              <a:t> Each leaf is an assumption with a range. A trip at the peak takes about 25 minutes from accepting to dropping, so a busy driver fits 2.4 an hour; the idle share is the share of online drivers with no rider at that moment.</a:t>
+              <a:t> Each leaf is a guess said aloud with its range. Counting trips per 100 people, never riders, keeps a commuter who rides both ways in the count. A peak trip takes about 25 minutes from accepting to dropping, so a busy driver fits 2.4 an hour; the buffer covers the busiest half hour.</a:t>
             </a:r>
           </a:p>
         </p:txBody>
@@ -25652,9 +25787,9 @@
                 <a:tableStyleId>{2D5ABB26-0587-4C30-8999-92F81FD0307C}</a:tableStyleId>
               </a:tblPr>
               <a:tblGrid>
-                <a:gridCol w="4442445"/>
-                <a:gridCol w="2762886"/>
-                <a:gridCol w="3925658"/>
+                <a:gridCol w="4972987"/>
+                <a:gridCol w="2700204"/>
+                <a:gridCol w="3457798"/>
               </a:tblGrid>
               <a:tr h="369824">
                 <a:tc>
@@ -25737,7 +25872,7 @@
                           </a:solidFill>
                           <a:latin typeface="Calibri"/>
                         </a:rPr>
-                        <a:t>People x share who ride</a:t>
+                        <a:t>People x weekday trips per person</a:t>
                       </a:r>
                     </a:p>
                   </a:txBody>
@@ -25759,7 +25894,7 @@
                           </a:solidFill>
                           <a:latin typeface="Calibri"/>
                         </a:rPr>
-                        <a:t>1 crore x 1 percent</a:t>
+                        <a:t>1 crore x 1 per 100</a:t>
                       </a:r>
                     </a:p>
                   </a:txBody>
@@ -25917,7 +26052,7 @@
                           </a:solidFill>
                           <a:latin typeface="Calibri"/>
                         </a:rPr>
-                        <a:t>about 8,300 requests an hour</a:t>
+                        <a:t>about 8,330 trips an hour</a:t>
                       </a:r>
                     </a:p>
                   </a:txBody>
@@ -26009,7 +26144,7 @@
                           </a:solidFill>
                           <a:latin typeface="Calibri"/>
                         </a:rPr>
-                        <a:t>Requests / trips per driver-hour</a:t>
+                        <a:t>Trips an hour / trips per driver-hour</a:t>
                       </a:r>
                     </a:p>
                   </a:txBody>
@@ -26031,7 +26166,7 @@
                           </a:solidFill>
                           <a:latin typeface="Calibri"/>
                         </a:rPr>
-                        <a:t>8,300 / 1.68</a:t>
+                        <a:t>8,330 / 1.68</a:t>
                       </a:r>
                     </a:p>
                   </a:txBody>
@@ -26268,7 +26403,7 @@
                 </a:solidFill>
                 <a:latin typeface="Calibri"/>
               </a:rPr>
-              <a:t>Which assumption moves the answer most across its range: a) the idle share, b) the share who ride on a weekday, c) the buffer, d) the trips a busy driver fits in an hour?</a:t>
+              <a:t>Using the ranges on S38, which assumption moves the answer most: a) the idle share, b) weekday trips per 100 people, c) the buffer, d) the trips a busy driver fits in an hour?</a:t>
             </a:r>
           </a:p>
         </p:txBody>
@@ -26746,7 +26881,7 @@
                 </a:solidFill>
                 <a:latin typeface="Georgia"/>
               </a:rPr>
-              <a:t>Answer: the share who ride moves it most</a:t>
+              <a:t>Answer: how often people ride moves it most</a:t>
             </a:r>
           </a:p>
         </p:txBody>
@@ -26802,8 +26937,8 @@
         </p:blipFill>
         <p:spPr>
           <a:xfrm>
-            <a:off x="2353807" y="1664208"/>
-            <a:ext cx="7484080" cy="3378200"/>
+            <a:off x="2584483" y="1664208"/>
+            <a:ext cx="7022728" cy="3147060"/>
           </a:xfrm>
           <a:prstGeom prst="rect">
             <a:avLst/>
@@ -26818,7 +26953,7 @@
         </p:nvSpPr>
         <p:spPr>
           <a:xfrm>
-            <a:off x="530352" y="5078984"/>
+            <a:off x="530352" y="4847844"/>
             <a:ext cx="11130991" cy="316992"/>
           </a:xfrm>
           <a:prstGeom prst="rect">
@@ -26853,8 +26988,8 @@
         </p:nvSpPr>
         <p:spPr>
           <a:xfrm>
-            <a:off x="530352" y="5405120"/>
-            <a:ext cx="11130991" cy="629920"/>
+            <a:off x="530352" y="5173980"/>
+            <a:ext cx="11130991" cy="861060"/>
           </a:xfrm>
           <a:prstGeom prst="roundRect">
             <a:avLst>
@@ -26901,8 +27036,8 @@
         </p:nvSpPr>
         <p:spPr>
           <a:xfrm>
-            <a:off x="676656" y="5533136"/>
-            <a:ext cx="45720" cy="373888"/>
+            <a:off x="676656" y="5301996"/>
+            <a:ext cx="45720" cy="605028"/>
           </a:xfrm>
           <a:prstGeom prst="roundRect">
             <a:avLst>
@@ -26947,8 +27082,8 @@
         </p:nvSpPr>
         <p:spPr>
           <a:xfrm>
-            <a:off x="877824" y="5523992"/>
-            <a:ext cx="10564063" cy="447040"/>
+            <a:off x="877824" y="5292852"/>
+            <a:ext cx="10564063" cy="678180"/>
           </a:xfrm>
           <a:prstGeom prst="rect">
             <a:avLst/>
@@ -26962,7 +27097,7 @@
           <a:lstStyle/>
           <a:p>
             <a:r>
-              <a:rPr sz="1000" b="1">
+              <a:rPr sz="1100" b="1">
                 <a:solidFill>
                   <a:srgbClr val="5B3FD6"/>
                 </a:solidFill>
@@ -26971,16 +27106,16 @@
               <a:t>The answer is b. </a:t>
             </a:r>
             <a:r>
-              <a:rPr sz="1000" b="0" i="0">
+              <a:rPr sz="1100" b="0" i="0">
                 <a:solidFill>
                   <a:srgbClr val="1A1440"/>
                 </a:solidFill>
                 <a:latin typeface="Calibri"/>
               </a:rPr>
-              <a:t>With every other factor at its central value, a ride share of 0.5 to 1.5 percent moves the answer from about 2,900 to about 8,600. The idle share moves it from about 5,100 to 6,400. </a:t>
-            </a:r>
-            <a:r>
-              <a:rPr sz="1000" b="1" i="0">
+              <a:t>With every other factor at its central value, weekday trips of 0.5 to 1.5 per 100 people move the answer from about 2,900 to about 8,600; the idle share moves it from about 5,100 to 6,400. </a:t>
+            </a:r>
+            <a:r>
+              <a:rPr sz="1100" b="1" i="0">
                 <a:solidFill>
                   <a:srgbClr val="1A1440"/>
                 </a:solidFill>
@@ -26989,13 +27124,13 @@
               <a:t>Say it as:</a:t>
             </a:r>
             <a:r>
-              <a:rPr sz="1000" b="0" i="0">
+              <a:rPr sz="1100" b="0" i="0">
                 <a:solidFill>
                   <a:srgbClr val="1A1440"/>
                 </a:solidFill>
                 <a:latin typeface="Calibri"/>
               </a:rPr>
-              <a:t> "about 5,700, between about 2,900 and 8,600, and mostly a question of how many people ride."</a:t>
+              <a:t> "about 5,700 before the check, from 2,900 to 8,600 with everything else held, and mostly a question of how often people ride."</a:t>
             </a:r>
           </a:p>
         </p:txBody>

--- a/content/W04/D2/slides/C2_W04_D02_half2_STUDENT.pptx
+++ b/content/W04/D2/slides/C2_W04_D02_half2_STUDENT.pptx
@@ -1058,7 +1058,7 @@
           <a:lstStyle/>
           <a:p>
             <a:r>
-              <a:t>LIVE, 1 minute, taken from the traps slide's seven. Then the break.</a:t>
+              <a:t>LIVE, 1 minute, which with S45's 6 makes the seven the traps were given. Then the break.</a:t>
             </a:r>
           </a:p>
           <a:p>
@@ -1648,12 +1648,12 @@
           </a:p>
           <a:p>
             <a:r>
-              <a:t>percent) are looser than idle at a moment, and like for like its trips per hour give about 0.21</a:t>
-            </a:r>
-          </a:p>
-          <a:p>
-            <a:r>
-              <a:t>before the launch, which held the wait at 4.8 minutes and gives about 5,000; a four-hour window</a:t>
+              <a:t>percent) are looser than idle at a moment, and like for like, its trips per hour before the launch,</a:t>
+            </a:r>
+          </a:p>
+          <a:p>
+            <a:r>
+              <a:t>when the wait held at 4.8 minutes, give an idle share of about 0.21 and about 5,000 drivers; a four-hour window</a:t>
             </a:r>
           </a:p>
           <a:p>
@@ -2148,7 +2148,22 @@
           </a:p>
           <a:p>
             <a:r>
-              <a:t>first lines and three terms, terms only.</a:t>
+              <a:t>first lines and three terms, terms only. Then say the handoff line, as the day sheet has it: "You can</a:t>
+            </a:r>
+          </a:p>
+          <a:p>
+            <a:r>
+              <a:t>now put a number in front of the people who lose under it and size one from nothing. Tomorrow's</a:t>
+            </a:r>
+          </a:p>
+          <a:p>
+            <a:r>
+              <a:t>ticket is a counting problem: a strip that suggests what goes with what, and a click-through that</a:t>
+            </a:r>
+          </a:p>
+          <a:p>
+            <a:r>
+              <a:t>fell when the strip began trusting counts. Read the three words tonight; we count them by hand first."</a:t>
             </a:r>
           </a:p>
           <a:p>
@@ -2383,7 +2398,7 @@
           <a:lstStyle/>
           <a:p>
             <a:r>
-              <a:t>LIVE, 2 minutes. Point at each step. The step first estimates skip is the fourth.</a:t>
+              <a:t>LIVE, 2 minutes. Point at each step. The step that first estimates skip is the fourth.</a:t>
             </a:r>
           </a:p>
           <a:p>
@@ -2713,7 +2728,12 @@
           </a:p>
           <a:p>
             <a:r>
-              <a:t>peak trips an hour. The idle share is the assumption Monday showed moving.</a:t>
+              <a:t>peak trips an hour. The idle share is the assumption Monday showed moving. Explorer scene T3 shows the</a:t>
+            </a:r>
+          </a:p>
+          <a:p>
+            <a:r>
+              <a:t>same swing: drag the trips-per-person slider from end to end.</a:t>
             </a:r>
           </a:p>
           <a:p>
@@ -7598,7 +7618,7 @@
                 </a:solidFill>
                 <a:latin typeface="Calibri"/>
               </a:rPr>
-              <a:t>"1 crore people, 1 trip per 100 people, so 1 lakh trips; a driver does 2.4 trips an hour; so about 41,700 drivers." A city head who takes that to the review asks for incentives for about seven times the drivers the chain says.</a:t>
+              <a:t>"1 crore people, 1 trip per 100 people, so 1 lakh trips; a driver does 2.4 trips an hour; so about 41,700 drivers." A city head who takes that to the review asks for incentives for about seven times the drivers the chain says are needed.</a:t>
             </a:r>
           </a:p>
         </p:txBody>
@@ -8421,7 +8441,7 @@
                 </a:solidFill>
                 <a:latin typeface="Calibri"/>
               </a:rPr>
-              <a:t>In pairs, seven minutes, all four steps on one sheet. Clarify volume or value (volume: the count of payments). Map active users x payments per user a day, and say how many of those go to shops and how many to people, so the payments a day are believable.</a:t>
+              <a:t>Work in pairs for seven minutes, with all four steps on one sheet. Clarify volume or value (volume: the count of payments). Map active users x payments per user a day, and say how many of those go to shops and how many to people, so the payments a day are believable.</a:t>
             </a:r>
           </a:p>
         </p:txBody>
@@ -8558,7 +8578,7 @@
                 </a:solidFill>
                 <a:latin typeface="Calibri"/>
               </a:rPr>
-              <a:t>scope clarified first, every assumption written with a range, a range given, and a sanity check in the right unit.</a:t>
+              <a:t>scope clarified first, every assumption written with a range, the answer given as a range, and a sanity check in the right unit.</a:t>
             </a:r>
           </a:p>
         </p:txBody>
@@ -13551,7 +13571,7 @@
                 </a:solidFill>
                 <a:latin typeface="Calibri"/>
               </a:rPr>
-              <a:t>No laptop and no phone, so the page is your own thinking. Write the page; then read it once as the finance partner would and fix the sentence they would attack.</a:t>
+              <a:t>Laptops and phones stay closed, so the page is your own thinking. Write the page; then read it once as the finance partner would and fix the sentence they would attack.</a:t>
             </a:r>
           </a:p>
         </p:txBody>
@@ -17105,7 +17125,7 @@
                 </a:solidFill>
                 <a:latin typeface="Calibri"/>
               </a:rPr>
-              <a:t>, a number that moves first, and judges the team on code that survives only once a holdout of users shows it tracks seat renewals.</a:t>
+              <a:t>, a number that moves first, and switches the team's judgement to surviving code once a holdout of users shows it tracks seat renewals.</a:t>
             </a:r>
           </a:p>
         </p:txBody>
@@ -22348,55 +22368,144 @@
       </p:sp>
       <p:sp>
         <p:nvSpPr>
-          <p:cNvPr id="9" name="TextBox 8"/>
-          <p:cNvSpPr txBox="1"/>
-          <p:nvPr/>
-        </p:nvSpPr>
-        <p:spPr>
-          <a:xfrm>
-            <a:off x="530352" y="1915667"/>
-            <a:ext cx="11130991" cy="1601216"/>
-          </a:xfrm>
-          <a:prstGeom prst="rect">
-            <a:avLst/>
-          </a:prstGeom>
-          <a:noFill/>
-        </p:spPr>
-        <p:txBody>
-          <a:bodyPr wrap="square" anchor="t" lIns="0" rIns="0" tIns="0" bIns="0">
-            <a:spAutoFit/>
-          </a:bodyPr>
-          <a:lstStyle/>
-          <a:p>
-            <a:pPr>
-              <a:spcAft>
-                <a:spcPts val="800"/>
-              </a:spcAft>
-            </a:pPr>
-            <a:r>
-              <a:rPr sz="1600" b="1" i="0">
+          <p:cNvPr id="9" name="Rounded Rectangle 8"/>
+          <p:cNvSpPr/>
+          <p:nvPr/>
+        </p:nvSpPr>
+        <p:spPr>
+          <a:xfrm>
+            <a:off x="530352" y="1956816"/>
+            <a:ext cx="11130991" cy="1341120"/>
+          </a:xfrm>
+          <a:prstGeom prst="roundRect">
+            <a:avLst>
+              <a:gd name="adj" fmla="val 8000"/>
+            </a:avLst>
+          </a:prstGeom>
+          <a:solidFill>
+            <a:srgbClr val="F7F5FD"/>
+          </a:solidFill>
+          <a:ln w="9525">
+            <a:solidFill>
+              <a:srgbClr val="E4E1F1"/>
+            </a:solidFill>
+          </a:ln>
+          <a:effectLst/>
+        </p:spPr>
+        <p:style>
+          <a:lnRef idx="1">
+            <a:schemeClr val="accent1"/>
+          </a:lnRef>
+          <a:fillRef idx="3">
+            <a:schemeClr val="accent1"/>
+          </a:fillRef>
+          <a:effectRef idx="2">
+            <a:schemeClr val="accent1"/>
+          </a:effectRef>
+          <a:fontRef idx="minor">
+            <a:schemeClr val="lt1"/>
+          </a:fontRef>
+        </p:style>
+        <p:txBody>
+          <a:bodyPr rtlCol="0" anchor="ctr" wrap="square"/>
+          <a:lstStyle/>
+          <a:p>
+            <a:pPr algn="ctr"/>
+          </a:p>
+        </p:txBody>
+      </p:sp>
+      <p:sp>
+        <p:nvSpPr>
+          <p:cNvPr id="10" name="Rounded Rectangle 9"/>
+          <p:cNvSpPr/>
+          <p:nvPr/>
+        </p:nvSpPr>
+        <p:spPr>
+          <a:xfrm>
+            <a:off x="676656" y="2084832"/>
+            <a:ext cx="45720" cy="1085088"/>
+          </a:xfrm>
+          <a:prstGeom prst="roundRect">
+            <a:avLst>
+              <a:gd name="adj" fmla="val 50000"/>
+            </a:avLst>
+          </a:prstGeom>
+          <a:solidFill>
+            <a:srgbClr val="5B3FD6"/>
+          </a:solidFill>
+          <a:ln>
+            <a:noFill/>
+          </a:ln>
+          <a:effectLst/>
+        </p:spPr>
+        <p:style>
+          <a:lnRef idx="1">
+            <a:schemeClr val="accent1"/>
+          </a:lnRef>
+          <a:fillRef idx="3">
+            <a:schemeClr val="accent1"/>
+          </a:fillRef>
+          <a:effectRef idx="2">
+            <a:schemeClr val="accent1"/>
+          </a:effectRef>
+          <a:fontRef idx="minor">
+            <a:schemeClr val="lt1"/>
+          </a:fontRef>
+        </p:style>
+        <p:txBody>
+          <a:bodyPr rtlCol="0" anchor="ctr" wrap="square"/>
+          <a:lstStyle/>
+          <a:p>
+            <a:pPr algn="ctr"/>
+          </a:p>
+        </p:txBody>
+      </p:sp>
+      <p:sp>
+        <p:nvSpPr>
+          <p:cNvPr id="11" name="TextBox 10"/>
+          <p:cNvSpPr txBox="1"/>
+          <p:nvPr/>
+        </p:nvSpPr>
+        <p:spPr>
+          <a:xfrm>
+            <a:off x="877824" y="2075688"/>
+            <a:ext cx="10564063" cy="1158240"/>
+          </a:xfrm>
+          <a:prstGeom prst="rect">
+            <a:avLst/>
+          </a:prstGeom>
+          <a:noFill/>
+        </p:spPr>
+        <p:txBody>
+          <a:bodyPr wrap="square" anchor="ctr" lIns="0" rIns="0" tIns="0" bIns="0">
+            <a:spAutoFit/>
+          </a:bodyPr>
+          <a:lstStyle/>
+          <a:p>
+            <a:r>
+              <a:rPr sz="1500" b="1">
+                <a:solidFill>
+                  <a:srgbClr val="5B3FD6"/>
+                </a:solidFill>
+                <a:latin typeface="Calibri"/>
+              </a:rPr>
+              <a:t>The answer is c, and nobody publishes it. </a:t>
+            </a:r>
+            <a:r>
+              <a:rPr sz="1500" b="0" i="0">
                 <a:solidFill>
                   <a:srgbClr val="1A1440"/>
                 </a:solidFill>
                 <a:latin typeface="Calibri"/>
               </a:rPr>
-              <a:t>The answer is c, and nobody publishes it, so its slot reads "to be found".</a:t>
-            </a:r>
-            <a:r>
-              <a:rPr sz="1600" b="0" i="0">
-                <a:solidFill>
-                  <a:srgbClr val="1A1440"/>
-                </a:solidFill>
-                <a:latin typeface="Calibri"/>
-              </a:rPr>
-              <a:t> a counts rider requests over six weeks in twelve zones: another unit, a longer period and a slice of the city. b counts sign-ups, another definition from drivers online at one moment. d is not wrong: it checks one link in the chain, a ratio the case's own data holds, and when the direct check does not exist that is the honest fallback the afternoon uses.</a:t>
+              <a:t>a counts rider requests over six weeks in twelve zones: another unit, a longer period and a slice of the city. b counts sign-ups, a different definition from drivers online at one moment. d is not wrong: it checks one link in the chain, a ratio the case's own data holds, and when the direct check does not exist, that is the honest fallback the afternoon uses.</a:t>
             </a:r>
           </a:p>
         </p:txBody>
       </p:sp>
       <p:pic>
         <p:nvPicPr>
-          <p:cNvPr id="10" name="mermaid diagram" descr="06bd107ab603f76c.png"/>
+          <p:cNvPr id="12" name="mermaid diagram" descr="06bd107ab603f76c.png"/>
           <p:cNvPicPr>
             <a:picLocks noChangeAspect="1"/>
           </p:cNvPicPr>
@@ -22410,7 +22519,7 @@
         </p:blipFill>
         <p:spPr>
           <a:xfrm>
-            <a:off x="530352" y="3644899"/>
+            <a:off x="530352" y="3462528"/>
             <a:ext cx="11130991" cy="2321562"/>
           </a:xfrm>
           <a:prstGeom prst="rect">
@@ -22420,7 +22529,7 @@
       </p:pic>
       <p:sp>
         <p:nvSpPr>
-          <p:cNvPr id="11" name="Oval 10"/>
+          <p:cNvPr id="13" name="Oval 12"/>
           <p:cNvSpPr/>
           <p:nvPr/>
         </p:nvSpPr>
@@ -22464,7 +22573,7 @@
       </p:sp>
       <p:sp>
         <p:nvSpPr>
-          <p:cNvPr id="12" name="TextBox 11"/>
+          <p:cNvPr id="14" name="TextBox 13"/>
           <p:cNvSpPr txBox="1"/>
           <p:nvPr/>
         </p:nvSpPr>
@@ -22499,7 +22608,7 @@
       </p:sp>
       <p:sp>
         <p:nvSpPr>
-          <p:cNvPr id="13" name="Oval 12"/>
+          <p:cNvPr id="15" name="Oval 14"/>
           <p:cNvSpPr/>
           <p:nvPr/>
         </p:nvSpPr>
@@ -22543,7 +22652,7 @@
       </p:sp>
       <p:sp>
         <p:nvSpPr>
-          <p:cNvPr id="14" name="TextBox 13"/>
+          <p:cNvPr id="16" name="TextBox 15"/>
           <p:cNvSpPr txBox="1"/>
           <p:nvPr/>
         </p:nvSpPr>
@@ -22578,7 +22687,7 @@
       </p:sp>
       <p:sp>
         <p:nvSpPr>
-          <p:cNvPr id="15" name="Oval 14"/>
+          <p:cNvPr id="17" name="Oval 16"/>
           <p:cNvSpPr/>
           <p:nvPr/>
         </p:nvSpPr>
@@ -22622,7 +22731,7 @@
       </p:sp>
       <p:sp>
         <p:nvSpPr>
-          <p:cNvPr id="16" name="TextBox 15"/>
+          <p:cNvPr id="18" name="TextBox 17"/>
           <p:cNvSpPr txBox="1"/>
           <p:nvPr/>
         </p:nvSpPr>
@@ -22657,7 +22766,7 @@
       </p:sp>
       <p:sp>
         <p:nvSpPr>
-          <p:cNvPr id="17" name="TextBox 16"/>
+          <p:cNvPr id="19" name="TextBox 18"/>
           <p:cNvSpPr txBox="1"/>
           <p:nvPr/>
         </p:nvSpPr>
@@ -23672,7 +23781,7 @@
                 </a:solidFill>
                 <a:latin typeface="Calibri"/>
               </a:rPr>
-              <a:t> Aced's guide to analyst interviews (an interview-preparation site) says the interviewer "isn't looking for a precise number" and is "evaluating your estimation framework", with each assumption stated so it can be challenged (checked 12 October 2026). A number that is wildly off still costs the answer, which is why step 4 exists.</a:t>
+              <a:t> Aced's guide to analyst interviews (an interview-preparation site) says the interviewer "isn't looking for a precise number" and is "evaluating your estimation framework", with each assumption stated so it can be challenged (checked 12 October 2026). A number that is wildly off still costs you the answer, which is why step 4 exists.</a:t>
             </a:r>
           </a:p>
         </p:txBody>
@@ -25250,7 +25359,7 @@
                 </a:solidFill>
                 <a:latin typeface="Calibri"/>
               </a:rPr>
-              <a:t> Each leaf is a guess said aloud with its range. Counting trips per 100 people, never riders, keeps a commuter who rides both ways in the count. A peak trip takes about 25 minutes from accepting to dropping, so a busy driver fits 2.4 an hour; the buffer covers the busiest half hour.</a:t>
+              <a:t> Each leaf is a guess said aloud with its range. Counting trips per 100 people, never riders, counts a commuter who rides both ways twice. A peak trip takes about 25 minutes from accepting to dropping, so a busy driver fits 2.4 an hour; the buffer covers the busiest half hour.</a:t>
             </a:r>
           </a:p>
         </p:txBody>

--- a/content/W04/D2/slides/C2_W04_D02_half2_STUDENT.pptx
+++ b/content/W04/D2/slides/C2_W04_D02_half2_STUDENT.pptx
@@ -2445,7 +2445,7 @@
           </a:p>
           <a:p>
             <a:r>
-              <a:t>Transition: what chapter 4 adds to Tuesday's node.</a:t>
+              <a:t>Transition: what chapter 8 adds to Tuesday's node.</a:t>
             </a:r>
           </a:p>
         </p:txBody>

--- a/content/W04/D2/slides/C2_W04_D02_half2_STUDENT.pptx
+++ b/content/W04/D2/slides/C2_W04_D02_half2_STUDENT.pptx
@@ -2835,7 +2835,12 @@
           </a:p>
           <a:p>
             <a:r>
-              <a:t>end to signal the clock. No teaching inside the slot.</a:t>
+              <a:t>end to signal the clock. No teaching inside the slot. Notebook 09 is for after the page is handed</a:t>
+            </a:r>
+          </a:p>
+          <a:p>
+            <a:r>
+              <a:t>in: it recounts the brief's numbers and runs chapter 7's page rules on a typed copy.</a:t>
             </a:r>
           </a:p>
           <a:p>
@@ -2915,7 +2920,7 @@
           </a:p>
           <a:p>
             <a:r>
-              <a:t>and scored; transcripts 2 and 3 and the AI-company variant are the evening's reading, from</a:t>
+              <a:t>and scored; transcript 2 and transcript 3, the AI-company variant, are the evening's reading, from</a:t>
             </a:r>
           </a:p>
           <a:p>
@@ -3085,7 +3090,7 @@
           </a:p>
           <a:p>
             <a:r>
-              <a:t>in extras/C2_W04_D02_interview_room_STUDENT.md.</a:t>
+              <a:t>in extras/C2_W04_D02_interview_room_STUDENT.md, and notebook 10 recomputes every number it speaks.</a:t>
             </a:r>
           </a:p>
           <a:p>
@@ -3660,27 +3665,32 @@
           <a:lstStyle/>
           <a:p>
             <a:r>
-              <a:t>LIVE, 5 minutes. Read the sentence once. Wednesday's pre-read ships tonight: the Instamart ticket's</a:t>
-            </a:r>
-          </a:p>
-          <a:p>
-            <a:r>
-              <a:t>first lines and three terms, terms only. Then say the handoff line, as the day sheet has it: "You can</a:t>
-            </a:r>
-          </a:p>
-          <a:p>
-            <a:r>
-              <a:t>now put a number in front of the people who lose under it and size one from nothing. Tomorrow's</a:t>
-            </a:r>
-          </a:p>
-          <a:p>
-            <a:r>
-              <a:t>ticket is a counting problem: a strip that suggests what goes with what, and a click-through that</a:t>
-            </a:r>
-          </a:p>
-          <a:p>
-            <a:r>
-              <a:t>fell when the strip began trusting counts. Read the three words tonight; we count them by hand first."</a:t>
+              <a:t>LIVE, 5 minutes. Read the sentence once. Wednesday's pre-read ships tonight: its five topics, their</a:t>
+            </a:r>
+          </a:p>
+          <a:p>
+            <a:r>
+              <a:t>words and the Instamart ticket's first lines, terms only. Then say the handoff line, as the day sheet has it: "You can</a:t>
+            </a:r>
+          </a:p>
+          <a:p>
+            <a:r>
+              <a:t>now put a number in front of the people who lose under it and size one from nothing. Tomorrow opens</a:t>
+            </a:r>
+          </a:p>
+          <a:p>
+            <a:r>
+              <a:t>on five topics about counting what goes with what, then a strip that suggests what goes with what,</a:t>
+            </a:r>
+          </a:p>
+          <a:p>
+            <a:r>
+              <a:t>and a click-through that fell when the strip began trusting counts. Read the topics and their words</a:t>
+            </a:r>
+          </a:p>
+          <a:p>
+            <a:r>
+              <a:t>tonight; we count them by hand first."</a:t>
             </a:r>
           </a:p>
           <a:p>
@@ -48243,7 +48253,7 @@
         </p:nvSpPr>
         <p:spPr>
           <a:xfrm>
-            <a:off x="530352" y="1956816"/>
+            <a:off x="530352" y="1908556"/>
             <a:ext cx="45720" cy="1605279"/>
           </a:xfrm>
           <a:prstGeom prst="roundRect">
@@ -48289,7 +48299,7 @@
         </p:nvSpPr>
         <p:spPr>
           <a:xfrm>
-            <a:off x="786384" y="1956816"/>
+            <a:off x="786384" y="1908556"/>
             <a:ext cx="10820095" cy="1605279"/>
           </a:xfrm>
           <a:prstGeom prst="rect">
@@ -48323,7 +48333,7 @@
         </p:nvSpPr>
         <p:spPr>
           <a:xfrm>
-            <a:off x="530352" y="3708400"/>
+            <a:off x="530352" y="3660140"/>
             <a:ext cx="11130991" cy="1341120"/>
           </a:xfrm>
           <a:prstGeom prst="roundRect">
@@ -48371,7 +48381,7 @@
         </p:nvSpPr>
         <p:spPr>
           <a:xfrm>
-            <a:off x="676656" y="3836416"/>
+            <a:off x="676656" y="3788156"/>
             <a:ext cx="45720" cy="1085088"/>
           </a:xfrm>
           <a:prstGeom prst="roundRect">
@@ -48417,7 +48427,7 @@
         </p:nvSpPr>
         <p:spPr>
           <a:xfrm>
-            <a:off x="877824" y="3827272"/>
+            <a:off x="877824" y="3779012"/>
             <a:ext cx="10564063" cy="1158240"/>
           </a:xfrm>
           <a:prstGeom prst="rect">
@@ -48460,8 +48470,8 @@
         </p:nvSpPr>
         <p:spPr>
           <a:xfrm>
-            <a:off x="530352" y="5214112"/>
-            <a:ext cx="11130991" cy="541020"/>
+            <a:off x="530352" y="5165852"/>
+            <a:ext cx="11130991" cy="807720"/>
           </a:xfrm>
           <a:prstGeom prst="roundRect">
             <a:avLst>
@@ -48508,8 +48518,8 @@
         </p:nvSpPr>
         <p:spPr>
           <a:xfrm>
-            <a:off x="676656" y="5342128"/>
-            <a:ext cx="45720" cy="284988"/>
+            <a:off x="676656" y="5293868"/>
+            <a:ext cx="45720" cy="551688"/>
           </a:xfrm>
           <a:prstGeom prst="roundRect">
             <a:avLst>
@@ -48554,8 +48564,8 @@
         </p:nvSpPr>
         <p:spPr>
           <a:xfrm>
-            <a:off x="877824" y="5332984"/>
-            <a:ext cx="10564063" cy="358140"/>
+            <a:off x="877824" y="5284724"/>
+            <a:ext cx="10564063" cy="624840"/>
           </a:xfrm>
           <a:prstGeom prst="rect">
             <a:avLst/>
@@ -48584,7 +48594,7 @@
                 </a:solidFill>
                 <a:latin typeface="Calibri"/>
               </a:rPr>
-              <a:t>Swiggy Instamart's cart page in Pune, and a strip that suggests what goes with what.</a:t>
+              <a:t>five topics on counting what goes with what, then Swiggy Instamart's cart page in Pune and its strip of suggestions.</a:t>
             </a:r>
           </a:p>
         </p:txBody>

--- a/content/W04/D2/slides/C2_W04_D02_half2_STUDENT.pptx
+++ b/content/W04/D2/slides/C2_W04_D02_half2_STUDENT.pptx
@@ -545,12 +545,12 @@
           <a:lstStyle/>
           <a:p>
             <a:r>
-              <a:t>LIVE, 20 minutes, straight after lunch. Two turns of seven minutes, then six to rebuild: the</a:t>
-            </a:r>
-          </a:p>
-          <a:p>
-            <a:r>
-              <a:t>studio run sheet's two-turn fallback. The member who presented first in round one objects first</a:t>
+              <a:t>LIVE, 20 minutes, straight after lunch. Two turns of seven minutes, then six to rebuild, as the</a:t>
+            </a:r>
+          </a:p>
+          <a:p>
+            <a:r>
+              <a:t>trainer's studio run sheet sets round two. The member who presented first in round one objects first</a:t>
             </a:r>
           </a:p>
           <a:p>
@@ -1115,7 +1115,12 @@
           </a:p>
           <a:p>
             <a:r>
-              <a:t>three lines and checks your own page the same way. Transition: the rules.</a:t>
+              <a:t>three lines and runs the five rules of S69 on both versions: the draft passes none of them.</a:t>
+            </a:r>
+          </a:p>
+          <a:p>
+            <a:r>
+              <a:t>Transition: the rules.</a:t>
             </a:r>
           </a:p>
         </p:txBody>
@@ -1285,7 +1290,12 @@
           </a:p>
           <a:p>
             <a:r>
-              <a:t>explorable explanations (explorer scene T3, the guesstimate tree with a slider per factor).</a:t>
+              <a:t>explorable explanations (the week's explorer at content/W04/D1/demos/C2_W04_D01_week_explorer_STUDENT.html, scene T3,</a:t>
+            </a:r>
+          </a:p>
+          <a:p>
+            <a:r>
+              <a:t>the guesstimate tree with a slider per factor).</a:t>
             </a:r>
           </a:p>
           <a:p>
@@ -2745,17 +2755,22 @@
           <a:lstStyle/>
           <a:p>
             <a:r>
-              <a:t>LIVE, 2 minutes. The checklist handed back after the slot asks five things: the claim first, one</a:t>
-            </a:r>
-          </a:p>
-          <a:p>
-            <a:r>
-              <a:t>number with its denominator, the caveat in sight, the action with its cost and signer, no method</a:t>
-            </a:r>
-          </a:p>
-          <a:p>
-            <a:r>
-              <a:t>words. Nothing is graded. Chapter 7's page for Ramesh is the worked example.</a:t>
+              <a:t>LIVE, 2 minutes. The checklist handed back after the slot is S69's five rules as five questions: the</a:t>
+            </a:r>
+          </a:p>
+          <a:p>
+            <a:r>
+              <a:t>claim first with what to do and why, one number with what it is divided by and its window, the</a:t>
+            </a:r>
+          </a:p>
+          <a:p>
+            <a:r>
+              <a:t>caveat before the action, the action with its cost and who signs, and no method word. Nothing is</a:t>
+            </a:r>
+          </a:p>
+          <a:p>
+            <a:r>
+              <a:t>graded. Chapter 7's page for Ramesh is the worked example.</a:t>
             </a:r>
           </a:p>
           <a:p>
@@ -2830,7 +2845,12 @@
           <a:lstStyle/>
           <a:p>
             <a:r>
-              <a:t>LIVE, 32 minutes of silent writing. Walk once early to answer scope questions and once near the</a:t>
+              <a:t>LIVE, 32 minutes of silent writing; with the 3 minutes of S83 and S84 the chapter is the 35 the</a:t>
+            </a:r>
+          </a:p>
+          <a:p>
+            <a:r>
+              <a:t>brief names. Walk once early to answer scope questions and once near the</a:t>
             </a:r>
           </a:p>
           <a:p>
@@ -3080,17 +3100,22 @@
           </a:p>
           <a:p>
             <a:r>
-              <a:t>blur the claim. The full hire-grade answer, with the per-driver-week line checked (each driver</a:t>
-            </a:r>
-          </a:p>
-          <a:p>
-            <a:r>
-              <a:t>online four more hours a week at 17 percent less per hour; the 140 joiners pulled the read down), is</a:t>
-            </a:r>
-          </a:p>
-          <a:p>
-            <a:r>
-              <a:t>in extras/C2_W04_D02_interview_room_STUDENT.md, and notebook 10 recomputes every number it speaks.</a:t>
+              <a:t>blur the claim. The full hire-grade answer, with the per-driver-week line checked (the idle tail's</a:t>
+            </a:r>
+          </a:p>
+          <a:p>
+            <a:r>
+              <a:t>180 drivers doubled their online hours while each hour earned 17 percent less; the 140 joiners pulled</a:t>
+            </a:r>
+          </a:p>
+          <a:p>
+            <a:r>
+              <a:t>the read down), is in extras/C2_W04_D02_interview_room_STUDENT.md, and notebook 10 recomputes the</a:t>
+            </a:r>
+          </a:p>
+          <a:p>
+            <a:r>
+              <a:t>numbers it speaks.</a:t>
             </a:r>
           </a:p>
           <a:p>
@@ -3345,7 +3370,17 @@
           </a:p>
           <a:p>
             <a:r>
-              <a:t>both keep the visible number while the north star does the judging. The study: Ziegler and</a:t>
+              <a:t>both keep the visible number while the north star does the judging. Check the units: 32 of 100</a:t>
+            </a:r>
+          </a:p>
+          <a:p>
+            <a:r>
+              <a:t>suggestions accepted, and a fifth of those deleted, leaves about 26 of 100 suggestions shown; a</a:t>
+            </a:r>
+          </a:p>
+          <a:p>
+            <a:r>
+              <a:t>share of characters would not multiply into a share of suggestions. The study: Ziegler and</a:t>
             </a:r>
           </a:p>
           <a:p>
@@ -14595,8 +14630,8 @@
         </p:blipFill>
         <p:spPr>
           <a:xfrm>
-            <a:off x="530352" y="2112501"/>
-            <a:ext cx="4786326" cy="3132868"/>
+            <a:off x="530352" y="2356205"/>
+            <a:ext cx="4786326" cy="2645461"/>
           </a:xfrm>
           <a:prstGeom prst="rect">
             <a:avLst/>
@@ -14611,7 +14646,7 @@
         </p:nvSpPr>
         <p:spPr>
           <a:xfrm>
-            <a:off x="530352" y="5281946"/>
+            <a:off x="530352" y="5038242"/>
             <a:ext cx="4786326" cy="524256"/>
           </a:xfrm>
           <a:prstGeom prst="rect">
@@ -15525,7 +15560,7 @@
                 </a:solidFill>
                 <a:latin typeface="Georgia"/>
               </a:rPr>
-              <a:t>Four rules for a page read in two minutes</a:t>
+              <a:t>Five rules for a page read in two minutes</a:t>
             </a:r>
           </a:p>
         </p:txBody>
@@ -15843,13 +15878,82 @@
       </p:sp>
       <p:sp>
         <p:nvSpPr>
-          <p:cNvPr id="17" name="Rounded Rectangle 16"/>
+          <p:cNvPr id="17" name="TextBox 16"/>
+          <p:cNvSpPr txBox="1"/>
+          <p:nvPr/>
+        </p:nvSpPr>
+        <p:spPr>
+          <a:xfrm>
+            <a:off x="530352" y="3413760"/>
+            <a:ext cx="502920" cy="333756"/>
+          </a:xfrm>
+          <a:prstGeom prst="rect">
+            <a:avLst/>
+          </a:prstGeom>
+          <a:noFill/>
+        </p:spPr>
+        <p:txBody>
+          <a:bodyPr wrap="square" anchor="t" lIns="0" rIns="0" tIns="0" bIns="0">
+            <a:spAutoFit/>
+          </a:bodyPr>
+          <a:lstStyle/>
+          <a:p>
+            <a:pPr algn="l"/>
+            <a:r>
+              <a:rPr sz="1800" b="0" i="0">
+                <a:solidFill>
+                  <a:srgbClr val="5B3FD6"/>
+                </a:solidFill>
+                <a:latin typeface="Georgia"/>
+              </a:rPr>
+              <a:t>05</a:t>
+            </a:r>
+          </a:p>
+        </p:txBody>
+      </p:sp>
+      <p:sp>
+        <p:nvSpPr>
+          <p:cNvPr id="18" name="TextBox 17"/>
+          <p:cNvSpPr txBox="1"/>
+          <p:nvPr/>
+        </p:nvSpPr>
+        <p:spPr>
+          <a:xfrm>
+            <a:off x="1097280" y="3450336"/>
+            <a:ext cx="10564063" cy="368808"/>
+          </a:xfrm>
+          <a:prstGeom prst="rect">
+            <a:avLst/>
+          </a:prstGeom>
+          <a:noFill/>
+        </p:spPr>
+        <p:txBody>
+          <a:bodyPr wrap="square" anchor="t" lIns="0" rIns="0" tIns="0" bIns="0">
+            <a:spAutoFit/>
+          </a:bodyPr>
+          <a:lstStyle/>
+          <a:p>
+            <a:r>
+              <a:rPr sz="1500" b="0" i="0">
+                <a:solidFill>
+                  <a:srgbClr val="1A1440"/>
+                </a:solidFill>
+                <a:latin typeface="Calibri"/>
+              </a:rPr>
+              <a:t>No method word stays on the page: write "divided by", never "denominator".</a:t>
+            </a:r>
+          </a:p>
+        </p:txBody>
+      </p:sp>
+      <p:sp>
+        <p:nvSpPr>
+          <p:cNvPr id="19" name="Rounded Rectangle 18"/>
           <p:cNvSpPr/>
           <p:nvPr/>
         </p:nvSpPr>
         <p:spPr>
           <a:xfrm>
-            <a:off x="530352" y="3560064"/>
+            <a:off x="530352" y="4002024"/>
             <a:ext cx="11130991" cy="862584"/>
           </a:xfrm>
           <a:prstGeom prst="roundRect">
@@ -15897,13 +16001,13 @@
       </p:sp>
       <p:sp>
         <p:nvSpPr>
-          <p:cNvPr id="18" name="Oval 17"/>
+          <p:cNvPr id="20" name="Oval 19"/>
           <p:cNvSpPr/>
           <p:nvPr/>
         </p:nvSpPr>
         <p:spPr>
           <a:xfrm>
-            <a:off x="758952" y="3762756"/>
+            <a:off x="758952" y="4204716"/>
             <a:ext cx="457200" cy="457200"/>
           </a:xfrm>
           <a:prstGeom prst="ellipse">
@@ -15941,7 +16045,7 @@
       </p:sp>
       <p:pic>
         <p:nvPicPr>
-          <p:cNvPr id="19" name="Picture 18" descr="mic_caee7398c80d.png"/>
+          <p:cNvPr id="21" name="Picture 20" descr="mic_caee7398c80d.png"/>
           <p:cNvPicPr>
             <a:picLocks noChangeAspect="1"/>
           </p:cNvPicPr>
@@ -15955,7 +16059,7 @@
         </p:blipFill>
         <p:spPr>
           <a:xfrm>
-            <a:off x="868680" y="3872484"/>
+            <a:off x="868680" y="4314444"/>
             <a:ext cx="237744" cy="237744"/>
           </a:xfrm>
           <a:prstGeom prst="rect">
@@ -15965,13 +16069,13 @@
       </p:pic>
       <p:sp>
         <p:nvSpPr>
-          <p:cNvPr id="20" name="TextBox 19"/>
-          <p:cNvSpPr txBox="1"/>
-          <p:nvPr/>
-        </p:nvSpPr>
-        <p:spPr>
-          <a:xfrm>
-            <a:off x="1399031" y="3706368"/>
+          <p:cNvPr id="22" name="TextBox 21"/>
+          <p:cNvSpPr txBox="1"/>
+          <p:nvPr/>
+        </p:nvSpPr>
+        <p:spPr>
+          <a:xfrm>
+            <a:off x="1399031" y="4148328"/>
             <a:ext cx="9987991" cy="160401"/>
           </a:xfrm>
           <a:prstGeom prst="rect">
@@ -16000,13 +16104,13 @@
       </p:sp>
       <p:sp>
         <p:nvSpPr>
-          <p:cNvPr id="21" name="TextBox 20"/>
-          <p:cNvSpPr txBox="1"/>
-          <p:nvPr/>
-        </p:nvSpPr>
-        <p:spPr>
-          <a:xfrm>
-            <a:off x="1399031" y="3925824"/>
+          <p:cNvPr id="23" name="TextBox 22"/>
+          <p:cNvSpPr txBox="1"/>
+          <p:nvPr/>
+        </p:nvSpPr>
+        <p:spPr>
+          <a:xfrm>
+            <a:off x="1399031" y="4367784"/>
             <a:ext cx="9987991" cy="423672"/>
           </a:xfrm>
           <a:prstGeom prst="rect">
@@ -16034,7 +16138,7 @@
       </p:sp>
       <p:pic>
         <p:nvPicPr>
-          <p:cNvPr id="22" name="mermaid diagram" descr="37d776c03f3287af.png"/>
+          <p:cNvPr id="24" name="mermaid diagram" descr="37d776c03f3287af.png"/>
           <p:cNvPicPr>
             <a:picLocks noChangeAspect="1"/>
           </p:cNvPicPr>
@@ -16048,8 +16152,8 @@
         </p:blipFill>
         <p:spPr>
           <a:xfrm>
-            <a:off x="2393927" y="4587240"/>
-            <a:ext cx="7403840" cy="1612392"/>
+            <a:off x="3408631" y="5029200"/>
+            <a:ext cx="5374432" cy="1170432"/>
           </a:xfrm>
           <a:prstGeom prst="rect">
             <a:avLst/>
@@ -16058,7 +16162,7 @@
       </p:pic>
       <p:sp>
         <p:nvSpPr>
-          <p:cNvPr id="23" name="Oval 22"/>
+          <p:cNvPr id="25" name="Oval 24"/>
           <p:cNvSpPr/>
           <p:nvPr/>
         </p:nvSpPr>
@@ -16102,7 +16206,7 @@
       </p:sp>
       <p:sp>
         <p:nvSpPr>
-          <p:cNvPr id="24" name="TextBox 23"/>
+          <p:cNvPr id="26" name="TextBox 25"/>
           <p:cNvSpPr txBox="1"/>
           <p:nvPr/>
         </p:nvSpPr>
@@ -16137,7 +16241,7 @@
       </p:sp>
       <p:sp>
         <p:nvSpPr>
-          <p:cNvPr id="25" name="Oval 24"/>
+          <p:cNvPr id="27" name="Oval 26"/>
           <p:cNvSpPr/>
           <p:nvPr/>
         </p:nvSpPr>
@@ -16181,7 +16285,7 @@
       </p:sp>
       <p:sp>
         <p:nvSpPr>
-          <p:cNvPr id="26" name="TextBox 25"/>
+          <p:cNvPr id="28" name="TextBox 27"/>
           <p:cNvSpPr txBox="1"/>
           <p:nvPr/>
         </p:nvSpPr>
@@ -16216,7 +16320,7 @@
       </p:sp>
       <p:sp>
         <p:nvSpPr>
-          <p:cNvPr id="27" name="Oval 26"/>
+          <p:cNvPr id="29" name="Oval 28"/>
           <p:cNvSpPr/>
           <p:nvPr/>
         </p:nvSpPr>
@@ -16260,7 +16364,7 @@
       </p:sp>
       <p:sp>
         <p:nvSpPr>
-          <p:cNvPr id="28" name="TextBox 27"/>
+          <p:cNvPr id="30" name="TextBox 29"/>
           <p:cNvSpPr txBox="1"/>
           <p:nvPr/>
         </p:nvSpPr>
@@ -16295,7 +16399,7 @@
       </p:sp>
       <p:sp>
         <p:nvSpPr>
-          <p:cNvPr id="29" name="Oval 28"/>
+          <p:cNvPr id="31" name="Oval 30"/>
           <p:cNvSpPr/>
           <p:nvPr/>
         </p:nvSpPr>
@@ -16339,7 +16443,7 @@
       </p:sp>
       <p:sp>
         <p:nvSpPr>
-          <p:cNvPr id="30" name="TextBox 29"/>
+          <p:cNvPr id="32" name="TextBox 31"/>
           <p:cNvSpPr txBox="1"/>
           <p:nvPr/>
         </p:nvSpPr>
@@ -16374,7 +16478,7 @@
       </p:sp>
       <p:sp>
         <p:nvSpPr>
-          <p:cNvPr id="31" name="Oval 30"/>
+          <p:cNvPr id="33" name="Oval 32"/>
           <p:cNvSpPr/>
           <p:nvPr/>
         </p:nvSpPr>
@@ -16418,7 +16522,7 @@
       </p:sp>
       <p:sp>
         <p:nvSpPr>
-          <p:cNvPr id="32" name="TextBox 31"/>
+          <p:cNvPr id="34" name="TextBox 33"/>
           <p:cNvSpPr txBox="1"/>
           <p:nvPr/>
         </p:nvSpPr>
@@ -16453,7 +16557,7 @@
       </p:sp>
       <p:sp>
         <p:nvSpPr>
-          <p:cNvPr id="33" name="TextBox 32"/>
+          <p:cNvPr id="35" name="TextBox 34"/>
           <p:cNvSpPr txBox="1"/>
           <p:nvPr/>
         </p:nvSpPr>
@@ -19849,7 +19953,7 @@
         <p:spPr>
           <a:xfrm>
             <a:off x="530352" y="1956816"/>
-            <a:ext cx="11130991" cy="1654048"/>
+            <a:ext cx="11130991" cy="1930400"/>
           </a:xfrm>
           <a:prstGeom prst="rect">
             <a:avLst/>
@@ -19922,7 +20026,7 @@
                 </a:solidFill>
                 <a:latin typeface="Calibri"/>
               </a:rPr>
-              <a:t>d) The online driver-hours behind each rider request in the case's own data</a:t>
+              <a:t>d) The online driver-hours behind each completed trip in the case's own data, pooled over both daily peak windows</a:t>
             </a:r>
           </a:p>
         </p:txBody>
@@ -20730,7 +20834,7 @@
                 </a:solidFill>
                 <a:latin typeface="Calibri"/>
               </a:rPr>
-              <a:t>a counts rider requests over six weeks in twelve zones: another unit, a longer period and a slice of the city. b counts sign-ups, a different definition from drivers online at one moment. d is not wrong: it checks one link in the chain, a ratio the case's own data holds, and when the direct check does not exist, that is the honest fallback the afternoon uses. Chapter 6's three tests decide each: same unit, same period, same definition.</a:t>
+              <a:t>a counts rider requests over six weeks in twelve zones: another unit, a longer period and a slice of the city. b counts sign-ups, a different definition from drivers online at one moment. d is not wrong: it checks one link in the chain, a ratio the case's own data holds over a wider period than one evening, and when the direct check does not exist, that is the honest fallback the afternoon uses. Chapter 6's three tests decide each: same unit, same period, same definition.</a:t>
             </a:r>
           </a:p>
         </p:txBody>
@@ -21415,8 +21519,8 @@
           <p:nvPr/>
         </p:nvGraphicFramePr>
         <p:xfrm>
-          <a:off x="530352" y="1872996"/>
-          <a:ext cx="11130990" cy="3072384"/>
+          <a:off x="530352" y="1682496"/>
+          <a:ext cx="11130990" cy="3314192"/>
         </p:xfrm>
         <a:graphic>
           <a:graphicData uri="http://schemas.openxmlformats.org/drawingml/2006/table">
@@ -21704,7 +21808,7 @@
                   </a:tcPr>
                 </a:tc>
               </a:tr>
-              <a:tr h="369824">
+              <a:tr h="611632">
                 <a:tc>
                   <a:txBody>
                     <a:bodyPr/>
@@ -21739,7 +21843,7 @@
                           </a:solidFill>
                           <a:latin typeface="Calibri"/>
                         </a:rPr>
-                        <a:t>A driver online on Uber may be busy on another app, so lean the idle share low</a:t>
+                        <a:t>A driver online on Uber may be on another app's trip, so more online drivers serve no Uber rider: lean the idle share high, which pushes the answer up</a:t>
                       </a:r>
                     </a:p>
                   </a:txBody>
@@ -21762,7 +21866,7 @@
         </p:nvSpPr>
         <p:spPr>
           <a:xfrm>
-            <a:off x="530352" y="5201412"/>
+            <a:off x="530352" y="5252720"/>
             <a:ext cx="11130991" cy="807720"/>
           </a:xfrm>
           <a:prstGeom prst="roundRect">
@@ -21810,7 +21914,7 @@
         </p:nvSpPr>
         <p:spPr>
           <a:xfrm>
-            <a:off x="676656" y="5329428"/>
+            <a:off x="676656" y="5380736"/>
             <a:ext cx="45720" cy="551688"/>
           </a:xfrm>
           <a:prstGeom prst="roundRect">
@@ -21856,7 +21960,7 @@
         </p:nvSpPr>
         <p:spPr>
           <a:xfrm>
-            <a:off x="877824" y="5320284"/>
+            <a:off x="877824" y="5371592"/>
             <a:ext cx="10564063" cy="624840"/>
           </a:xfrm>
           <a:prstGeom prst="rect">
@@ -27652,7 +27756,7 @@
         <p:spPr>
           <a:xfrm>
             <a:off x="530352" y="1956816"/>
-            <a:ext cx="11130991" cy="1074420"/>
+            <a:ext cx="11130991" cy="1341120"/>
           </a:xfrm>
           <a:prstGeom prst="roundRect">
             <a:avLst>
@@ -27700,7 +27804,7 @@
         <p:spPr>
           <a:xfrm>
             <a:off x="676656" y="2084832"/>
-            <a:ext cx="45720" cy="818388"/>
+            <a:ext cx="45720" cy="1085088"/>
           </a:xfrm>
           <a:prstGeom prst="roundRect">
             <a:avLst>
@@ -27746,7 +27850,7 @@
         <p:spPr>
           <a:xfrm>
             <a:off x="877824" y="2075688"/>
-            <a:ext cx="10564063" cy="891540"/>
+            <a:ext cx="10564063" cy="1158240"/>
           </a:xfrm>
           <a:prstGeom prst="rect">
             <a:avLst/>
@@ -27775,7 +27879,7 @@
                 </a:solidFill>
                 <a:latin typeface="Calibri"/>
               </a:rPr>
-              <a:t>Work in pairs for seven minutes, with all four steps on one sheet. Clarify volume or value (volume: the count of payments). Map active users x payments per user a day, and say how many of those go to shops and how many to people, so the payments a day are believable.</a:t>
+              <a:t>UPI is India's system for paying from a bank account by phone, by a code or a phone number. Work in pairs for seven minutes, with all four steps on one sheet. Clarify volume or value (volume: the count of payments). Map active users x payments per user a day, and say how many of those go to shops and how many to people, so the payments a day are believable.</a:t>
             </a:r>
           </a:p>
         </p:txBody>
@@ -27788,7 +27892,7 @@
         </p:nvSpPr>
         <p:spPr>
           <a:xfrm>
-            <a:off x="530352" y="3195828"/>
+            <a:off x="530352" y="3462528"/>
             <a:ext cx="11130991" cy="807720"/>
           </a:xfrm>
           <a:prstGeom prst="roundRect">
@@ -27836,7 +27940,7 @@
         </p:nvSpPr>
         <p:spPr>
           <a:xfrm>
-            <a:off x="676656" y="3323844"/>
+            <a:off x="676656" y="3590544"/>
             <a:ext cx="45720" cy="551688"/>
           </a:xfrm>
           <a:prstGeom prst="roundRect">
@@ -27882,7 +27986,7 @@
         </p:nvSpPr>
         <p:spPr>
           <a:xfrm>
-            <a:off x="877824" y="3314700"/>
+            <a:off x="877824" y="3581400"/>
             <a:ext cx="10564063" cy="624840"/>
           </a:xfrm>
           <a:prstGeom prst="rect">
@@ -34620,7 +34724,7 @@
                 </a:solidFill>
                 <a:latin typeface="Calibri"/>
               </a:rPr>
-              <a:t>One number and its denominator</a:t>
+              <a:t>One number, and what it is divided by</a:t>
             </a:r>
           </a:p>
         </p:txBody>
@@ -35746,7 +35850,7 @@
         <p:spPr>
           <a:xfrm>
             <a:off x="530352" y="1956816"/>
-            <a:ext cx="2645587" cy="2195576"/>
+            <a:ext cx="2645587" cy="2385568"/>
           </a:xfrm>
           <a:prstGeom prst="roundRect">
             <a:avLst>
@@ -35973,7 +36077,7 @@
         <p:spPr>
           <a:xfrm>
             <a:off x="3358819" y="1956816"/>
-            <a:ext cx="2645587" cy="2195576"/>
+            <a:ext cx="2645587" cy="2385568"/>
           </a:xfrm>
           <a:prstGeom prst="roundRect">
             <a:avLst>
@@ -36151,7 +36255,7 @@
                 </a:solidFill>
                 <a:latin typeface="Calibri"/>
               </a:rPr>
-              <a:t>One number and its denominator</a:t>
+              <a:t>One number, and what it is divided by</a:t>
             </a:r>
           </a:p>
         </p:txBody>
@@ -36165,7 +36269,7 @@
         <p:spPr>
           <a:xfrm>
             <a:off x="3559987" y="3534664"/>
-            <a:ext cx="2243251" cy="399796"/>
+            <a:ext cx="2243251" cy="581406"/>
           </a:xfrm>
           <a:prstGeom prst="rect">
             <a:avLst/>
@@ -36186,7 +36290,7 @@
                 </a:solidFill>
                 <a:latin typeface="Calibri"/>
               </a:rPr>
-              <a:t>The rupees per peak online hour, before and after</a:t>
+              <a:t>The rupees per peak online hour, before and after, with the window</a:t>
             </a:r>
           </a:p>
         </p:txBody>
@@ -36200,7 +36304,7 @@
         <p:spPr>
           <a:xfrm>
             <a:off x="6187287" y="1956816"/>
-            <a:ext cx="2645587" cy="2195576"/>
+            <a:ext cx="2645587" cy="2385568"/>
           </a:xfrm>
           <a:prstGeom prst="roundRect">
             <a:avLst>
@@ -36413,7 +36517,7 @@
                 </a:solidFill>
                 <a:latin typeface="Calibri"/>
               </a:rPr>
-              <a:t>In the body of the page, where the reader meets it before the action</a:t>
+              <a:t>Before the action, so the reader meets the doubt before the cost</a:t>
             </a:r>
           </a:p>
         </p:txBody>
@@ -36427,7 +36531,7 @@
         <p:spPr>
           <a:xfrm>
             <a:off x="9015755" y="1956816"/>
-            <a:ext cx="2645587" cy="2195576"/>
+            <a:ext cx="2645587" cy="2385568"/>
           </a:xfrm>
           <a:prstGeom prst="roundRect">
             <a:avLst>
@@ -36653,8 +36757,8 @@
         </p:nvSpPr>
         <p:spPr>
           <a:xfrm>
-            <a:off x="530352" y="4335272"/>
-            <a:ext cx="11130991" cy="1048512"/>
+            <a:off x="530352" y="4525264"/>
+            <a:ext cx="11130991" cy="1324864"/>
           </a:xfrm>
           <a:prstGeom prst="rect">
             <a:avLst/>
@@ -36688,7 +36792,7 @@
                 </a:solidFill>
                 <a:latin typeface="Calibri"/>
               </a:rPr>
-              <a:t> is the city head, with the three roles reading over a shoulder: finance reads rupees, driver operations reads drivers, marketing reads sign-ups. Words a non-technical reader would not know (denominator, index, guardrail) stay off the page, or are said in plain words.</a:t>
+              <a:t> is the city head, with the three roles reading over a shoulder: finance reads rupees, driver operations reads drivers, marketing reads sign-ups. Method words a non-technical reader would not know (denominator, index, guardrail, north star) stay off the page; say what each means instead. These are S69's five rules, unchanged.</a:t>
             </a:r>
           </a:p>
         </p:txBody>
@@ -40483,8 +40587,8 @@
           <p:nvPr/>
         </p:nvGraphicFramePr>
         <p:xfrm>
-          <a:off x="530352" y="1938782"/>
-          <a:ext cx="11130990" cy="2674112"/>
+          <a:off x="530352" y="1956816"/>
+          <a:ext cx="11130990" cy="2328672"/>
         </p:xfrm>
         <a:graphic>
           <a:graphicData uri="http://schemas.openxmlformats.org/drawingml/2006/table">
@@ -40496,14 +40600,14 @@
                 <a:gridCol w="5565495"/>
                 <a:gridCol w="5565495"/>
               </a:tblGrid>
-              <a:tr h="369824">
+              <a:tr h="335280">
                 <a:tc>
                   <a:txBody>
                     <a:bodyPr/>
                     <a:lstStyle/>
                     <a:p>
                       <a:r>
-                        <a:rPr sz="1450" b="1" i="0">
+                        <a:rPr sz="1250" b="1" i="0">
                           <a:solidFill>
                             <a:srgbClr val="FFFFFF"/>
                           </a:solidFill>
@@ -40525,7 +40629,7 @@
                     <a:lstStyle/>
                     <a:p>
                       <a:r>
-                        <a:rPr sz="1450" b="1" i="0">
+                        <a:rPr sz="1250" b="1" i="0">
                           <a:solidFill>
                             <a:srgbClr val="FFFFFF"/>
                           </a:solidFill>
@@ -40542,14 +40646,14 @@
                   </a:tcPr>
                 </a:tc>
               </a:tr>
-              <a:tr h="2304288">
+              <a:tr h="1993392">
                 <a:tc>
                   <a:txBody>
                     <a:bodyPr/>
                     <a:lstStyle/>
                     <a:p>
                       <a:r>
-                        <a:rPr sz="1400" b="0" i="0">
+                        <a:rPr sz="1200" b="0" i="0">
                           <a:solidFill>
                             <a:srgbClr val="1A1440"/>
                           </a:solidFill>
@@ -40571,13 +40675,13 @@
                     <a:lstStyle/>
                     <a:p>
                       <a:r>
-                        <a:rPr sz="1400" b="0" i="0">
+                        <a:rPr sz="1200" b="0" i="0">
                           <a:solidFill>
                             <a:srgbClr val="1A1440"/>
                           </a:solidFill>
                           <a:latin typeface="Calibri"/>
                         </a:rPr>
-                        <a:t>"You are deciding whether to keep, end or change the guarantee. It is paying for online hours that carry no trips: an hour online brought in Rs 314 of fares and now brings in Rs 260 at the same fare, while the median wait barely moved, 4.8 to 4.6 minutes. Part of the fall may be the monsoon. Test paying per completed trip with an acceptance floor on half the drivers, picked at random, for six weeks; city-wide it saves Rs 58 lakh to Rs 92.7 lakh. You sign the test."</a:t>
+                        <a:t>"You are deciding whether to keep, end or change the guarantee. It is paying for online hours that carry no trips: an hour online brought in Rs 314 of fares and now brings in Rs 260 at the same fare, while the median wait barely moved, 4.8 to 4.6 minutes. Part of the fall may be the monsoon. Test paying per completed trip with an acceptance floor on half the drivers, picked at random, for six weeks, at a per-trip rate fixed first; across the enrolled drivers it saves Rs 58 lakh to Rs 92.7 lakh over six weeks if a half to a fifth of the idle top-up is still paid. You sign the test."</a:t>
                       </a:r>
                     </a:p>
                   </a:txBody>
@@ -40600,8 +40704,8 @@
         </p:nvSpPr>
         <p:spPr>
           <a:xfrm>
-            <a:off x="530352" y="4868926"/>
-            <a:ext cx="11130991" cy="1074420"/>
+            <a:off x="530352" y="4541520"/>
+            <a:ext cx="11130991" cy="736600"/>
           </a:xfrm>
           <a:prstGeom prst="roundRect">
             <a:avLst>
@@ -40648,8 +40752,8 @@
         </p:nvSpPr>
         <p:spPr>
           <a:xfrm>
-            <a:off x="676656" y="4996942"/>
-            <a:ext cx="45720" cy="818388"/>
+            <a:off x="676656" y="4669536"/>
+            <a:ext cx="45720" cy="480568"/>
           </a:xfrm>
           <a:prstGeom prst="roundRect">
             <a:avLst>
@@ -40694,8 +40798,8 @@
         </p:nvSpPr>
         <p:spPr>
           <a:xfrm>
-            <a:off x="877824" y="4987798"/>
-            <a:ext cx="10564063" cy="891540"/>
+            <a:off x="877824" y="4660392"/>
+            <a:ext cx="10564063" cy="553720"/>
           </a:xfrm>
           <a:prstGeom prst="rect">
             <a:avLst/>
@@ -40709,7 +40813,7 @@
           <a:lstStyle/>
           <a:p>
             <a:r>
-              <a:rPr sz="1500" b="1">
+              <a:rPr sz="1300" b="1">
                 <a:solidFill>
                   <a:srgbClr val="5B3FD6"/>
                 </a:solidFill>
@@ -40718,7 +40822,7 @@
               <a:t>The follow-ups: </a:t>
             </a:r>
             <a:r>
-              <a:rPr sz="1500" b="0" i="0">
+              <a:rPr sz="1300" b="0" i="0">
                 <a:solidFill>
                   <a:srgbClr val="1A1440"/>
                 </a:solidFill>
@@ -41465,7 +41569,7 @@
         </p:nvGraphicFramePr>
         <p:xfrm>
           <a:off x="530352" y="1956816"/>
-          <a:ext cx="11130990" cy="2674112"/>
+          <a:ext cx="11130990" cy="2535936"/>
         </p:xfrm>
         <a:graphic>
           <a:graphicData uri="http://schemas.openxmlformats.org/drawingml/2006/table">
@@ -41477,14 +41581,14 @@
                 <a:gridCol w="5565495"/>
                 <a:gridCol w="5565495"/>
               </a:tblGrid>
-              <a:tr h="369824">
+              <a:tr h="335280">
                 <a:tc>
                   <a:txBody>
                     <a:bodyPr/>
                     <a:lstStyle/>
                     <a:p>
                       <a:r>
-                        <a:rPr sz="1450" b="1" i="0">
+                        <a:rPr sz="1250" b="1" i="0">
                           <a:solidFill>
                             <a:srgbClr val="FFFFFF"/>
                           </a:solidFill>
@@ -41506,7 +41610,7 @@
                     <a:lstStyle/>
                     <a:p>
                       <a:r>
-                        <a:rPr sz="1450" b="1" i="0">
+                        <a:rPr sz="1250" b="1" i="0">
                           <a:solidFill>
                             <a:srgbClr val="FFFFFF"/>
                           </a:solidFill>
@@ -41523,14 +41627,14 @@
                   </a:tcPr>
                 </a:tc>
               </a:tr>
-              <a:tr h="2304288">
+              <a:tr h="2200656">
                 <a:tc>
                   <a:txBody>
                     <a:bodyPr/>
                     <a:lstStyle/>
                     <a:p>
                       <a:r>
-                        <a:rPr sz="1400" b="0" i="0">
+                        <a:rPr sz="1200" b="0" i="0">
                           <a:solidFill>
                             <a:srgbClr val="1A1440"/>
                           </a:solidFill>
@@ -41552,13 +41656,13 @@
                     <a:lstStyle/>
                     <a:p>
                       <a:r>
-                        <a:rPr sz="1400" b="0" i="0">
+                        <a:rPr sz="1200" b="0" i="0">
                           <a:solidFill>
                             <a:srgbClr val="1A1440"/>
                           </a:solidFill>
                           <a:latin typeface="Calibri"/>
                         </a:rPr>
-                        <a:t>"One moment of the three-hour weekday evening peak, one product, the city's median wait under five minutes. Drivers online is trips an hour divided by the trips one online driver completes in an hour, times a buffer: 8,330 / 1.68 x 1.15, about 5,700; trips per person moves it most, 2,900 to 8,600. Like for like, the case's 0.53 driver-hours per trip against my 0.60 says I run an eighth high, so 5,000 to 5,700, and each thousand idle drivers costs up to Rs 9 lakh an evening at the floor."</a:t>
+                        <a:t>"One moment of the three-hour weekday evening peak, one product, the city's median wait under five minutes, the outer zones sized on their own. Drivers online is trips an hour divided by the trips one online driver completes in an hour, times a buffer: 8,330 / 1.68 x 1.15, about 5,700, more if many drivers run two apps; trips per person moves it most, 2,900 to 8,600. Like for like, the case's 0.53 driver-hours per trip, pooled over both daily peaks, against my 0.60 says I run an eighth high: about 5,000 to 5,700 where the routes agree, inside the wider range, and each thousand idle drivers costs up to Rs 9 lakh an evening at the floor."</a:t>
                       </a:r>
                     </a:p>
                   </a:txBody>
@@ -41581,8 +41685,8 @@
         </p:nvSpPr>
         <p:spPr>
           <a:xfrm>
-            <a:off x="530352" y="4886960"/>
-            <a:ext cx="11130991" cy="807720"/>
+            <a:off x="530352" y="4748784"/>
+            <a:ext cx="11130991" cy="736600"/>
           </a:xfrm>
           <a:prstGeom prst="roundRect">
             <a:avLst>
@@ -41629,8 +41733,8 @@
         </p:nvSpPr>
         <p:spPr>
           <a:xfrm>
-            <a:off x="676656" y="5014976"/>
-            <a:ext cx="45720" cy="551688"/>
+            <a:off x="676656" y="4876800"/>
+            <a:ext cx="45720" cy="480568"/>
           </a:xfrm>
           <a:prstGeom prst="roundRect">
             <a:avLst>
@@ -41675,8 +41779,8 @@
         </p:nvSpPr>
         <p:spPr>
           <a:xfrm>
-            <a:off x="877824" y="5005832"/>
-            <a:ext cx="10564063" cy="624840"/>
+            <a:off x="877824" y="4867656"/>
+            <a:ext cx="10564063" cy="553720"/>
           </a:xfrm>
           <a:prstGeom prst="rect">
             <a:avLst/>
@@ -41690,7 +41794,7 @@
           <a:lstStyle/>
           <a:p>
             <a:r>
-              <a:rPr sz="1500" b="1">
+              <a:rPr sz="1300" b="1">
                 <a:solidFill>
                   <a:srgbClr val="5B3FD6"/>
                 </a:solidFill>
@@ -41699,7 +41803,7 @@
               <a:t>The follow-ups: </a:t>
             </a:r>
             <a:r>
-              <a:rPr sz="1500" b="0" i="0">
+              <a:rPr sz="1300" b="0" i="0">
                 <a:solidFill>
                   <a:srgbClr val="1A1440"/>
                 </a:solidFill>
@@ -43493,7 +43597,7 @@
         <p:spPr>
           <a:xfrm>
             <a:off x="530352" y="1956816"/>
-            <a:ext cx="11130991" cy="1607820"/>
+            <a:ext cx="11130991" cy="2141220"/>
           </a:xfrm>
           <a:prstGeom prst="roundRect">
             <a:avLst>
@@ -43541,7 +43645,7 @@
         <p:spPr>
           <a:xfrm>
             <a:off x="676656" y="2084832"/>
-            <a:ext cx="45720" cy="1351788"/>
+            <a:ext cx="45720" cy="1885187"/>
           </a:xfrm>
           <a:prstGeom prst="roundRect">
             <a:avLst>
@@ -43587,7 +43691,7 @@
         <p:spPr>
           <a:xfrm>
             <a:off x="877824" y="2075688"/>
-            <a:ext cx="10564063" cy="1424940"/>
+            <a:ext cx="10564063" cy="1958340"/>
           </a:xfrm>
           <a:prstGeom prst="rect">
             <a:avLst/>
@@ -43616,7 +43720,7 @@
                 </a:solidFill>
                 <a:latin typeface="Calibri"/>
               </a:rPr>
-              <a:t>A coding assistant's sales deck quotes "acceptance rate 32 percent", the share of suggestions developers accept, even ones deleted soon after. The analyst proposes a new </a:t>
+              <a:t>A coding assistant's sales deck quotes "acceptance rate 32 percent", the share of suggestions developers accept, even ones deleted soon after; if a fifth of accepted suggestions are deleted within a week, about 26 of every 100 shown survive. The analyst proposes a new </a:t>
             </a:r>
             <a:r>
               <a:rPr sz="1500" b="1" i="0">
@@ -43634,7 +43738,7 @@
                 </a:solidFill>
                 <a:latin typeface="Calibri"/>
               </a:rPr>
-              <a:t>, the one number the team is judged on: characters of suggested code still in the file seven days after acceptance, per developer who saw a suggestion that week, with two </a:t>
+              <a:t>, the one number the team is judged on: characters of suggested code still in the file seven days after acceptance, per paid seat a week (a seat is one developer's paid licence), so a developer who switches the tool off still counts. Two </a:t>
             </a:r>
             <a:r>
               <a:rPr sz="1500" b="1" i="0">
@@ -43652,7 +43756,7 @@
                 </a:solidFill>
                 <a:latin typeface="Calibri"/>
               </a:rPr>
-              <a:t> that catch padding (retained characters per accepted character; edits per accepted suggestion).</a:t>
+              <a:t>, numbers that must not get worse, catch padding: characters per accepted suggestion, and a monthly sample of surviving suggestions read by engineers.</a:t>
             </a:r>
           </a:p>
         </p:txBody>
@@ -43665,7 +43769,7 @@
         </p:nvSpPr>
         <p:spPr>
           <a:xfrm>
-            <a:off x="530352" y="3729228"/>
+            <a:off x="530352" y="4262627"/>
             <a:ext cx="11130991" cy="1341120"/>
           </a:xfrm>
           <a:prstGeom prst="roundRect">
@@ -43713,7 +43817,7 @@
         </p:nvSpPr>
         <p:spPr>
           <a:xfrm>
-            <a:off x="676656" y="3857244"/>
+            <a:off x="676656" y="4390643"/>
             <a:ext cx="45720" cy="1085088"/>
           </a:xfrm>
           <a:prstGeom prst="roundRect">
@@ -43759,7 +43863,7 @@
         </p:nvSpPr>
         <p:spPr>
           <a:xfrm>
-            <a:off x="877824" y="3848100"/>
+            <a:off x="877824" y="4381499"/>
             <a:ext cx="10564063" cy="1158240"/>
           </a:xfrm>
           <a:prstGeom prst="rect">
@@ -43825,7 +43929,7 @@
                 </a:solidFill>
                 <a:latin typeface="Calibri"/>
               </a:rPr>
-              <a:t>, a number that moves first, and switches the team's judgement to surviving code once a holdout of users shows it tracks seat renewals.</a:t>
+              <a:t>, a number that moves first, and judges the team on surviving code once last year's renewals show it separates the accounts that renewed from those that cut seats better than acceptance does.</a:t>
             </a:r>
           </a:p>
         </p:txBody>
@@ -44511,7 +44615,7 @@
         </p:nvGraphicFramePr>
         <p:xfrm>
           <a:off x="530352" y="1956816"/>
-          <a:ext cx="11130989" cy="2682240"/>
+          <a:ext cx="11130989" cy="3511296"/>
         </p:xfrm>
         <a:graphic>
           <a:graphicData uri="http://schemas.openxmlformats.org/drawingml/2006/table">
@@ -44520,10 +44624,10 @@
                 <a:tableStyleId>{2D5ABB26-0587-4C30-8999-92F81FD0307C}</a:tableStyleId>
               </a:tblPr>
               <a:tblGrid>
-                <a:gridCol w="4890706"/>
-                <a:gridCol w="1369720"/>
-                <a:gridCol w="1833007"/>
-                <a:gridCol w="3037556"/>
+                <a:gridCol w="3720477"/>
+                <a:gridCol w="1041978"/>
+                <a:gridCol w="1394413"/>
+                <a:gridCol w="4974121"/>
               </a:tblGrid>
               <a:tr h="335280">
                 <a:tc>
@@ -44615,7 +44719,7 @@
                   </a:tcPr>
                 </a:tc>
               </a:tr>
-              <a:tr h="335280">
+              <a:tr h="542544">
                 <a:tc>
                   <a:txBody>
                     <a:bodyPr/>
@@ -44694,7 +44798,7 @@
                           </a:solidFill>
                           <a:latin typeface="Calibri"/>
                         </a:rPr>
-                        <a:t>unit, window and target pinned</a:t>
+                        <a:t>what is decided or counted, the window, and the target or the audience pinned</a:t>
                       </a:r>
                     </a:p>
                   </a:txBody>
@@ -44705,7 +44809,7 @@
                   </a:tcPr>
                 </a:tc>
               </a:tr>
-              <a:tr h="335280">
+              <a:tr h="542544">
                 <a:tc>
                   <a:txBody>
                     <a:bodyPr/>
@@ -44885,7 +44989,7 @@
                   </a:tcPr>
                 </a:tc>
               </a:tr>
-              <a:tr h="335280">
+              <a:tr h="542544">
                 <a:tc>
                   <a:txBody>
                     <a:bodyPr/>
@@ -45155,7 +45259,7 @@
                   </a:tcPr>
                 </a:tc>
               </a:tr>
-              <a:tr h="335280">
+              <a:tr h="542544">
                 <a:tc>
                   <a:txBody>
                     <a:bodyPr/>
@@ -48253,8 +48357,8 @@
         </p:nvSpPr>
         <p:spPr>
           <a:xfrm>
-            <a:off x="530352" y="1908556"/>
-            <a:ext cx="45720" cy="1605279"/>
+            <a:off x="530352" y="1682496"/>
+            <a:ext cx="45720" cy="1889759"/>
           </a:xfrm>
           <a:prstGeom prst="roundRect">
             <a:avLst>
@@ -48299,8 +48403,8 @@
         </p:nvSpPr>
         <p:spPr>
           <a:xfrm>
-            <a:off x="786384" y="1908556"/>
-            <a:ext cx="10820095" cy="1605279"/>
+            <a:off x="786384" y="1682496"/>
+            <a:ext cx="10820095" cy="1889759"/>
           </a:xfrm>
           <a:prstGeom prst="rect">
             <a:avLst/>
@@ -48320,7 +48424,7 @@
                 </a:solidFill>
                 <a:latin typeface="Georgia"/>
               </a:rPr>
-              <a:t>"The scheme is paying for online hours that carry no trips: Rs 314 to Rs 260 per peak online hour at a flat Rs 165 fare. Part of it may be the monsoon. Test paying per completed peak trip with an acceptance floor: city-wide, it saves Rs 58 lakh to Rs 92.7 lakh over six weeks if a half to a fifth of the idle drivers' top-up is still paid. At the evening peak the city needs about 5,000 to 5,700 drivers online, and how often people ride could move that from 2,900 to 8,600."</a:t>
+              <a:t>"The scheme is paying for online hours that carry no trips: Rs 314 to Rs 260 per peak online hour at a flat Rs 165 fare. Part of it may be the monsoon. Test paying per completed peak trip with an acceptance floor: across the enrolled drivers, it saves Rs 58 lakh to Rs 92.7 lakh over six weeks if a half to a fifth of the idle drivers' top-up is still paid, and the per-trip rate decides where it lands. At the evening peak the city needs about 5,000 to 5,700 drivers online, and how often people ride could move that from 2,900 to 8,600."</a:t>
             </a:r>
           </a:p>
         </p:txBody>
@@ -48333,7 +48437,7 @@
         </p:nvSpPr>
         <p:spPr>
           <a:xfrm>
-            <a:off x="530352" y="3660140"/>
+            <a:off x="530352" y="3718560"/>
             <a:ext cx="11130991" cy="1341120"/>
           </a:xfrm>
           <a:prstGeom prst="roundRect">
@@ -48381,7 +48485,7 @@
         </p:nvSpPr>
         <p:spPr>
           <a:xfrm>
-            <a:off x="676656" y="3788156"/>
+            <a:off x="676656" y="3846575"/>
             <a:ext cx="45720" cy="1085088"/>
           </a:xfrm>
           <a:prstGeom prst="roundRect">
@@ -48427,7 +48531,7 @@
         </p:nvSpPr>
         <p:spPr>
           <a:xfrm>
-            <a:off x="877824" y="3779012"/>
+            <a:off x="877824" y="3837431"/>
             <a:ext cx="10564063" cy="1158240"/>
           </a:xfrm>
           <a:prstGeom prst="rect">
@@ -48470,7 +48574,7 @@
         </p:nvSpPr>
         <p:spPr>
           <a:xfrm>
-            <a:off x="530352" y="5165852"/>
+            <a:off x="530352" y="5224272"/>
             <a:ext cx="11130991" cy="807720"/>
           </a:xfrm>
           <a:prstGeom prst="roundRect">
@@ -48518,7 +48622,7 @@
         </p:nvSpPr>
         <p:spPr>
           <a:xfrm>
-            <a:off x="676656" y="5293868"/>
+            <a:off x="676656" y="5352287"/>
             <a:ext cx="45720" cy="551688"/>
           </a:xfrm>
           <a:prstGeom prst="roundRect">
@@ -48564,7 +48668,7 @@
         </p:nvSpPr>
         <p:spPr>
           <a:xfrm>
-            <a:off x="877824" y="5284724"/>
+            <a:off x="877824" y="5343144"/>
             <a:ext cx="10564063" cy="624840"/>
           </a:xfrm>
           <a:prstGeom prst="rect">

--- a/content/W04/D2/slides/C2_W04_D02_half2_STUDENT.pptx
+++ b/content/W04/D2/slides/C2_W04_D02_half2_STUDENT.pptx
@@ -1110,7 +1110,7 @@
           </a:p>
           <a:p>
             <a:r>
-              <a:t>sentences and 6 numbers on the page, four method words against none. Notebook 07 counts them in</a:t>
+              <a:t>sentences and 7 numbers on the page, four method words against none. Notebook 07 counts them in</a:t>
             </a:r>
           </a:p>
           <a:p>
@@ -2845,12 +2845,12 @@
           <a:lstStyle/>
           <a:p>
             <a:r>
-              <a:t>LIVE, 32 minutes of silent writing; with the 3 minutes of S83 and S84 the chapter is the 35 the</a:t>
-            </a:r>
-          </a:p>
-          <a:p>
-            <a:r>
-              <a:t>brief names. Walk once early to answer scope questions and once near the</a:t>
+              <a:t>LIVE, 32 minutes of silent writing; with the 3 minutes of the chapter's opener, S83 and S84 the</a:t>
+            </a:r>
+          </a:p>
+          <a:p>
+            <a:r>
+              <a:t>chapter is the 35 the brief names. Walk once early to answer scope questions and once near the</a:t>
             </a:r>
           </a:p>
           <a:p>
@@ -3100,22 +3100,27 @@
           </a:p>
           <a:p>
             <a:r>
-              <a:t>blur the claim. The full hire-grade answer, with the per-driver-week line checked (the idle tail's</a:t>
-            </a:r>
-          </a:p>
-          <a:p>
-            <a:r>
-              <a:t>180 drivers doubled their online hours while each hour earned 17 percent less; the 140 joiners pulled</a:t>
-            </a:r>
-          </a:p>
-          <a:p>
-            <a:r>
-              <a:t>the read down), is in extras/C2_W04_D02_interview_room_STUDENT.md, and notebook 10 recomputes the</a:t>
-            </a:r>
-          </a:p>
-          <a:p>
-            <a:r>
-              <a:t>numbers it speaks.</a:t>
+              <a:t>blur the claim. The full hire-grade answer, with the per-driver-week line checked (it rose on the</a:t>
+            </a:r>
+          </a:p>
+          <a:p>
+            <a:r>
+              <a:t>880 outside the idle tail, who drove about 4 percent more hours at an unchanged Rs 313.5 an hour,</a:t>
+            </a:r>
+          </a:p>
+          <a:p>
+            <a:r>
+              <a:t>while the idle tail doubled its hours for 12 percent fewer trips and the 140 joiners pulled the read</a:t>
+            </a:r>
+          </a:p>
+          <a:p>
+            <a:r>
+              <a:t>down), is in extras/C2_W04_D02_interview_room_STUDENT.md, and notebook 10 recomputes the numbers it</a:t>
+            </a:r>
+          </a:p>
+          <a:p>
+            <a:r>
+              <a:t>speaks.</a:t>
             </a:r>
           </a:p>
           <a:p>
@@ -13836,7 +13841,7 @@
                           </a:solidFill>
                           <a:latin typeface="Calibri"/>
                         </a:rPr>
-                        <a:t>Sales per hour fell from Rs 1,190 in September to Rs 1,050 in October, and sales per customer held at Rs 100.</a:t>
+                        <a:t>Sales per hour fell from Rs 1,190 in September to Rs 1,050 in October, the two added hours selling at most Rs 350 each, and sales per customer held at Rs 100.</a:t>
                       </a:r>
                     </a:p>
                   </a:txBody>
@@ -22682,8 +22687,8 @@
         </p:blipFill>
         <p:spPr>
           <a:xfrm>
-            <a:off x="1905721" y="1664208"/>
-            <a:ext cx="8380251" cy="3256280"/>
+            <a:off x="2039073" y="1664208"/>
+            <a:ext cx="8113547" cy="3152648"/>
           </a:xfrm>
           <a:prstGeom prst="rect">
             <a:avLst/>
@@ -22698,22 +22703,22 @@
         </p:nvSpPr>
         <p:spPr>
           <a:xfrm>
-            <a:off x="530352" y="4966208"/>
-            <a:ext cx="11130991" cy="1233424"/>
-          </a:xfrm>
-          <a:prstGeom prst="rect">
-            <a:avLst/>
-          </a:prstGeom>
-          <a:noFill/>
-        </p:spPr>
-        <p:txBody>
-          <a:bodyPr wrap="square" anchor="t" lIns="0" rIns="0" tIns="0" bIns="0">
-            <a:spAutoFit/>
-          </a:bodyPr>
-          <a:lstStyle/>
-          <a:p>
-            <a:r>
-              <a:rPr sz="1600" b="1" i="0">
+            <a:off x="530352" y="4862576"/>
+            <a:ext cx="11130991" cy="1337056"/>
+          </a:xfrm>
+          <a:prstGeom prst="rect">
+            <a:avLst/>
+          </a:prstGeom>
+          <a:noFill/>
+        </p:spPr>
+        <p:txBody>
+          <a:bodyPr wrap="square" anchor="t" lIns="0" rIns="0" tIns="0" bIns="0">
+            <a:spAutoFit/>
+          </a:bodyPr>
+          <a:lstStyle/>
+          <a:p>
+            <a:r>
+              <a:rPr sz="1400" b="1" i="0">
                 <a:solidFill>
                   <a:srgbClr val="1A1440"/>
                 </a:solidFill>
@@ -22722,13 +22727,13 @@
               <a:t>Drivers online = (trips to serve an hour / trips per online driver-hour) x buffer.</a:t>
             </a:r>
             <a:r>
-              <a:rPr sz="1600" b="0" i="0">
+              <a:rPr sz="1400" b="0" i="0">
                 <a:solidFill>
                   <a:srgbClr val="1A1440"/>
                 </a:solidFill>
                 <a:latin typeface="Calibri"/>
               </a:rPr>
-              <a:t> Each leaf is a guess said aloud with its range. Counting trips per 100 people, never riders, counts a commuter who rides both ways twice. A peak trip takes about 25 minutes from accepting to dropping, so a busy driver fits 2.4 an hour; the buffer covers the busiest half hour.</a:t>
+              <a:t> Each leaf is a guess said aloud with its range. Counting trips per 100 people, never riders, counts a commuter who rides both ways twice; one in a hundred is a guess (most people take no app ride on a weekday, a rider goes out and back, and Uber is one choice among several), so it gets the widest range. A peak trip takes about 25 minutes from accepting to dropping, a guess to check first against the app's trip times, so a busy driver fits 2.4 an hour; the buffer covers the busiest half hour.</a:t>
             </a:r>
           </a:p>
         </p:txBody>
@@ -26056,7 +26061,7 @@
         <p:spPr>
           <a:xfrm>
             <a:off x="530352" y="3419856"/>
-            <a:ext cx="11130991" cy="1601216"/>
+            <a:ext cx="11130991" cy="1877568"/>
           </a:xfrm>
           <a:prstGeom prst="rect">
             <a:avLst/>
@@ -26090,7 +26095,7 @@
                 </a:solidFill>
                 <a:latin typeface="Calibri"/>
               </a:rPr>
-              <a:t> Re-run at the case's 1.90 trips an hour: 8,330 / 1.90 x 1.15 = about 5,000, so say about 5,000 to 5,700. The case pools both daily windows on all seven days (42 hours a week), so it checks the ratio's size, never the city's count, and a published count of drivers online at Hyderabad's evening peak has not been found.</a:t>
+              <a:t> Re-run at the case's 1.90 trips an hour: 8,330 / 1.90 x 1.15 = about 5,000, so say about 5,000 to 5,700 where the two routes agree, inside the 2,900 to 8,600 that trips per person sets. The case pools both daily windows on all seven days (42 hours a week), so it checks the ratio's size, never the city's count, and a published count of drivers online at Hyderabad's evening peak has not been found.</a:t>
             </a:r>
           </a:p>
         </p:txBody>
@@ -32625,7 +32630,7 @@
       </p:sp>
       <p:pic>
         <p:nvPicPr>
-          <p:cNvPr id="9" name="mermaid diagram" descr="0adedbda7aa3dede.png"/>
+          <p:cNvPr id="9" name="mermaid diagram" descr="552bed3165770c1b.png"/>
           <p:cNvPicPr>
             <a:picLocks noChangeAspect="1"/>
           </p:cNvPicPr>
@@ -32640,7 +32645,7 @@
         <p:spPr>
           <a:xfrm>
             <a:off x="2152497" y="1956816"/>
-            <a:ext cx="7886700" cy="1857375"/>
+            <a:ext cx="7886700" cy="2357437"/>
           </a:xfrm>
           <a:prstGeom prst="rect">
             <a:avLst/>
@@ -32655,7 +32660,7 @@
         </p:nvSpPr>
         <p:spPr>
           <a:xfrm>
-            <a:off x="530352" y="3960495"/>
+            <a:off x="530352" y="4460557"/>
             <a:ext cx="11130991" cy="1324864"/>
           </a:xfrm>
           <a:prstGeom prst="rect">
@@ -48424,7 +48429,7 @@
                 </a:solidFill>
                 <a:latin typeface="Georgia"/>
               </a:rPr>
-              <a:t>"The scheme is paying for online hours that carry no trips: Rs 314 to Rs 260 per peak online hour at a flat Rs 165 fare. Part of it may be the monsoon. Test paying per completed peak trip with an acceptance floor: across the enrolled drivers, it saves Rs 58 lakh to Rs 92.7 lakh over six weeks if a half to a fifth of the idle drivers' top-up is still paid, and the per-trip rate decides where it lands. At the evening peak the city needs about 5,000 to 5,700 drivers online, and how often people ride could move that from 2,900 to 8,600."</a:t>
+              <a:t>"The scheme is paying for online hours that carry no trips: Rs 314 to Rs 260 per peak online hour at a flat Rs 165 fare. Part of it may be the monsoon. Test paying per completed peak trip with an acceptance floor: across the enrolled drivers, it saves Rs 58 lakh to Rs 92.7 lakh over six weeks if a half to a fifth of the idle drivers' top-up is still paid, and the per-trip rate can move it within that range or beyond it. At the evening peak the city needs about 5,000 to 5,700 drivers online, and how often people ride could move that from 2,900 to 8,600."</a:t>
             </a:r>
           </a:p>
         </p:txBody>

--- a/content/W04/D2/slides/C2_W04_D02_half2_STUDENT.pptx
+++ b/content/W04/D2/slides/C2_W04_D02_half2_STUDENT.pptx
@@ -3100,22 +3100,22 @@
           </a:p>
           <a:p>
             <a:r>
-              <a:t>blur the claim. The full hire-grade answer, with the per-driver-week line checked (it rose on the</a:t>
-            </a:r>
-          </a:p>
-          <a:p>
-            <a:r>
-              <a:t>880 outside the idle tail, who drove about 4 percent more hours at an unchanged Rs 313.5 an hour,</a:t>
-            </a:r>
-          </a:p>
-          <a:p>
-            <a:r>
-              <a:t>while the idle tail doubled its hours for 12 percent fewer trips and the 140 joiners pulled the read</a:t>
-            </a:r>
-          </a:p>
-          <a:p>
-            <a:r>
-              <a:t>down), is in extras/C2_W04_D02_interview_room_STUDENT.md, and notebook 10 recomputes the numbers it</a:t>
+              <a:t>blur the claim. The full hire-grade answer, with the per-driver-week line checked (longer weeks,</a:t>
+            </a:r>
+          </a:p>
+          <a:p>
+            <a:r>
+              <a:t>mostly the other 880 drivers there before the launch working about 4 percent more hours at an</a:t>
+            </a:r>
+          </a:p>
+          <a:p>
+            <a:r>
+              <a:t>unchanged Rs 313.5 an hour, while the idle tail doubled its hours and brought in 12 percent less in</a:t>
+            </a:r>
+          </a:p>
+          <a:p>
+            <a:r>
+              <a:t>fares), is in extras/C2_W04_D02_interview_room_STUDENT.md, and notebook 10 recomputes the numbers it</a:t>
             </a:r>
           </a:p>
           <a:p>
@@ -40686,7 +40686,7 @@
                           </a:solidFill>
                           <a:latin typeface="Calibri"/>
                         </a:rPr>
-                        <a:t>"You are deciding whether to keep, end or change the guarantee. It is paying for online hours that carry no trips: an hour online brought in Rs 314 of fares and now brings in Rs 260 at the same fare, while the median wait barely moved, 4.8 to 4.6 minutes. Part of the fall may be the monsoon. Test paying per completed trip with an acceptance floor on half the drivers, picked at random, for six weeks, at a per-trip rate fixed first; across the enrolled drivers it saves Rs 58 lakh to Rs 92.7 lakh over six weeks if a half to a fifth of the idle top-up is still paid. You sign the test."</a:t>
+                        <a:t>"You are deciding whether to keep, end or change the guarantee. It is paying for online hours that carry no trips: an hour online brought in Rs 314 of fares and now brings in Rs 260 at the same fare, while the median wait barely moved, 4.8 to 4.6 minutes. Part of the fall may be the monsoon. Test paying per completed trip with an acceptance floor on half the drivers, picked at random, for six weeks, at a per-trip rate fixed first; rolled out to every enrolled driver it saves Rs 58 lakh to Rs 92.7 lakh over six weeks if a half to a fifth of the idle top-up is still paid. You sign the test."</a:t>
                       </a:r>
                     </a:p>
                   </a:txBody>

--- a/content/W04/D2/slides/C2_W04_D02_half2_STUDENT.pptx
+++ b/content/W04/D2/slides/C2_W04_D02_half2_STUDENT.pptx
@@ -20839,7 +20839,7 @@
                 </a:solidFill>
                 <a:latin typeface="Calibri"/>
               </a:rPr>
-              <a:t>a counts rider requests over six weeks in twelve zones: another unit, a longer period and a slice of the city. b counts sign-ups, a different definition from drivers online at one moment. d is not wrong: it checks one link in the chain, a ratio the case's own data holds over a wider period than one evening, and when the direct check does not exist, that is the honest fallback the afternoon uses. Chapter 6's three tests decide each: same unit, same period, same definition.</a:t>
+              <a:t>a counts rider requests over six weeks in twelve zones: another unit, a longer period and a slice of the city. b counts sign-ups, a different definition from drivers online at one moment. d is not wrong: it checks one link in the chain, a ratio the case's own data holds over a wider period than one evening, and when the direct check does not exist, that is the honest fallback the afternoon uses.</a:t>
             </a:r>
           </a:p>
         </p:txBody>

--- a/content/W04/D2/slides/C2_W04_D02_half2_STUDENT.pptx
+++ b/content/W04/D2/slides/C2_W04_D02_half2_STUDENT.pptx
@@ -1105,22 +1105,27 @@
           <a:lstStyle/>
           <a:p>
             <a:r>
-              <a:t>LIVE, 1 minute. The counts come from the page itself: nine lines and 13 numbers on the draft, four</a:t>
-            </a:r>
-          </a:p>
-          <a:p>
-            <a:r>
-              <a:t>sentences and 7 numbers on the page, four method words against none. Notebook 07 counts them in</a:t>
-            </a:r>
-          </a:p>
-          <a:p>
-            <a:r>
-              <a:t>three lines and runs the five rules of S69 on both versions: the draft passes none of them.</a:t>
-            </a:r>
-          </a:p>
-          <a:p>
-            <a:r>
-              <a:t>Transition: the rules.</a:t>
+              <a:t>LIVE, 1 minute. Count one thing by hand first: how many method words does opening A on S65 carry?</a:t>
+            </a:r>
+          </a:p>
+          <a:p>
+            <a:r>
+              <a:t>Three (north star, denominator, index), and the draft's last line adds a fourth, guardrail; the</a:t>
+            </a:r>
+          </a:p>
+          <a:p>
+            <a:r>
+              <a:t>page carries none. Then the picture: nine lines and 13 numbers on the draft, four sentences and 7</a:t>
+            </a:r>
+          </a:p>
+          <a:p>
+            <a:r>
+              <a:t>numbers on the page. Notebook 07 counts them in a short loop and runs the five rules of S69 on both</a:t>
+            </a:r>
+          </a:p>
+          <a:p>
+            <a:r>
+              <a:t>versions: the draft passes none of them. Transition: the rules.</a:t>
             </a:r>
           </a:p>
         </p:txBody>
@@ -37658,9 +37663,33 @@
           </a:p>
         </p:txBody>
       </p:sp>
-      <p:sp>
-        <p:nvSpPr>
-          <p:cNvPr id="13" name="Oval 12"/>
+      <p:pic>
+        <p:nvPicPr>
+          <p:cNvPr id="13" name="mermaid diagram" descr="588a3f799e08076c.png"/>
+          <p:cNvPicPr>
+            <a:picLocks noChangeAspect="1"/>
+          </p:cNvPicPr>
+          <p:nvPr/>
+        </p:nvPicPr>
+        <p:blipFill>
+          <a:blip r:embed="rId5"/>
+          <a:stretch>
+            <a:fillRect/>
+          </a:stretch>
+        </p:blipFill>
+        <p:spPr>
+          <a:xfrm>
+            <a:off x="780897" y="3829304"/>
+            <a:ext cx="10629900" cy="1600200"/>
+          </a:xfrm>
+          <a:prstGeom prst="rect">
+            <a:avLst/>
+          </a:prstGeom>
+        </p:spPr>
+      </p:pic>
+      <p:sp>
+        <p:nvSpPr>
+          <p:cNvPr id="14" name="Oval 13"/>
           <p:cNvSpPr/>
           <p:nvPr/>
         </p:nvSpPr>
@@ -37704,7 +37733,7 @@
       </p:sp>
       <p:sp>
         <p:nvSpPr>
-          <p:cNvPr id="14" name="TextBox 13"/>
+          <p:cNvPr id="15" name="TextBox 14"/>
           <p:cNvSpPr txBox="1"/>
           <p:nvPr/>
         </p:nvSpPr>
@@ -37739,7 +37768,7 @@
       </p:sp>
       <p:sp>
         <p:nvSpPr>
-          <p:cNvPr id="15" name="Oval 14"/>
+          <p:cNvPr id="16" name="Oval 15"/>
           <p:cNvSpPr/>
           <p:nvPr/>
         </p:nvSpPr>
@@ -37783,7 +37812,7 @@
       </p:sp>
       <p:sp>
         <p:nvSpPr>
-          <p:cNvPr id="16" name="TextBox 15"/>
+          <p:cNvPr id="17" name="TextBox 16"/>
           <p:cNvSpPr txBox="1"/>
           <p:nvPr/>
         </p:nvSpPr>
@@ -37818,7 +37847,7 @@
       </p:sp>
       <p:sp>
         <p:nvSpPr>
-          <p:cNvPr id="17" name="Oval 16"/>
+          <p:cNvPr id="18" name="Oval 17"/>
           <p:cNvSpPr/>
           <p:nvPr/>
         </p:nvSpPr>
@@ -37862,7 +37891,7 @@
       </p:sp>
       <p:sp>
         <p:nvSpPr>
-          <p:cNvPr id="18" name="TextBox 17"/>
+          <p:cNvPr id="19" name="TextBox 18"/>
           <p:cNvSpPr txBox="1"/>
           <p:nvPr/>
         </p:nvSpPr>
@@ -37897,7 +37926,7 @@
       </p:sp>
       <p:sp>
         <p:nvSpPr>
-          <p:cNvPr id="19" name="Oval 18"/>
+          <p:cNvPr id="20" name="Oval 19"/>
           <p:cNvSpPr/>
           <p:nvPr/>
         </p:nvSpPr>
@@ -37941,7 +37970,7 @@
       </p:sp>
       <p:sp>
         <p:nvSpPr>
-          <p:cNvPr id="20" name="TextBox 19"/>
+          <p:cNvPr id="21" name="TextBox 20"/>
           <p:cNvSpPr txBox="1"/>
           <p:nvPr/>
         </p:nvSpPr>
@@ -37976,7 +38005,7 @@
       </p:sp>
       <p:sp>
         <p:nvSpPr>
-          <p:cNvPr id="21" name="Oval 20"/>
+          <p:cNvPr id="22" name="Oval 21"/>
           <p:cNvSpPr/>
           <p:nvPr/>
         </p:nvSpPr>
@@ -38020,7 +38049,7 @@
       </p:sp>
       <p:sp>
         <p:nvSpPr>
-          <p:cNvPr id="22" name="TextBox 21"/>
+          <p:cNvPr id="23" name="TextBox 22"/>
           <p:cNvSpPr txBox="1"/>
           <p:nvPr/>
         </p:nvSpPr>
@@ -38055,7 +38084,7 @@
       </p:sp>
       <p:sp>
         <p:nvSpPr>
-          <p:cNvPr id="23" name="TextBox 22"/>
+          <p:cNvPr id="24" name="TextBox 23"/>
           <p:cNvSpPr txBox="1"/>
           <p:nvPr/>
         </p:nvSpPr>
@@ -44610,17 +44639,41 @@
           </a:p>
         </p:txBody>
       </p:sp>
+      <p:pic>
+        <p:nvPicPr>
+          <p:cNvPr id="9" name="mermaid diagram" descr="217871f107e37084.png"/>
+          <p:cNvPicPr>
+            <a:picLocks noChangeAspect="1"/>
+          </p:cNvPicPr>
+          <p:nvPr/>
+        </p:nvPicPr>
+        <p:blipFill>
+          <a:blip r:embed="rId5"/>
+          <a:stretch>
+            <a:fillRect/>
+          </a:stretch>
+        </p:blipFill>
+        <p:spPr>
+          <a:xfrm>
+            <a:off x="530352" y="3377456"/>
+            <a:ext cx="4786326" cy="1127214"/>
+          </a:xfrm>
+          <a:prstGeom prst="rect">
+            <a:avLst/>
+          </a:prstGeom>
+        </p:spPr>
+      </p:pic>
       <p:graphicFrame>
         <p:nvGraphicFramePr>
-          <p:cNvPr id="9" name="Table 8"/>
+          <p:cNvPr id="10" name="Table 9"/>
           <p:cNvGraphicFramePr>
             <a:graphicFrameLocks noGrp="1"/>
           </p:cNvGraphicFramePr>
           <p:nvPr/>
         </p:nvGraphicFramePr>
         <p:xfrm>
-          <a:off x="530352" y="1956816"/>
-          <a:ext cx="11130989" cy="3511296"/>
+          <a:off x="5761917" y="1814068"/>
+          <a:ext cx="5899424" cy="4253992"/>
         </p:xfrm>
         <a:graphic>
           <a:graphicData uri="http://schemas.openxmlformats.org/drawingml/2006/table">
@@ -44629,19 +44682,19 @@
                 <a:tableStyleId>{2D5ABB26-0587-4C30-8999-92F81FD0307C}</a:tableStyleId>
               </a:tblPr>
               <a:tblGrid>
-                <a:gridCol w="3720477"/>
-                <a:gridCol w="1041978"/>
-                <a:gridCol w="1394413"/>
-                <a:gridCol w="4974121"/>
+                <a:gridCol w="1971198"/>
+                <a:gridCol w="914400"/>
+                <a:gridCol w="1042628"/>
+                <a:gridCol w="1971198"/>
               </a:tblGrid>
-              <a:tr h="335280">
+              <a:tr h="318008">
                 <a:tc>
                   <a:txBody>
                     <a:bodyPr/>
                     <a:lstStyle/>
                     <a:p>
                       <a:r>
-                        <a:rPr sz="1250" b="1" i="0">
+                        <a:rPr sz="1150" b="1" i="0">
                           <a:solidFill>
                             <a:srgbClr val="FFFFFF"/>
                           </a:solidFill>
@@ -44663,7 +44716,7 @@
                     <a:lstStyle/>
                     <a:p>
                       <a:r>
-                        <a:rPr sz="1250" b="1" i="0">
+                        <a:rPr sz="1150" b="1" i="0">
                           <a:solidFill>
                             <a:srgbClr val="FFFFFF"/>
                           </a:solidFill>
@@ -44685,7 +44738,7 @@
                     <a:lstStyle/>
                     <a:p>
                       <a:r>
-                        <a:rPr sz="1250" b="1" i="0">
+                        <a:rPr sz="1150" b="1" i="0">
                           <a:solidFill>
                             <a:srgbClr val="FFFFFF"/>
                           </a:solidFill>
@@ -44707,7 +44760,7 @@
                     <a:lstStyle/>
                     <a:p>
                       <a:r>
-                        <a:rPr sz="1250" b="1" i="0">
+                        <a:rPr sz="1150" b="1" i="0">
                           <a:solidFill>
                             <a:srgbClr val="FFFFFF"/>
                           </a:solidFill>
@@ -44724,14 +44777,14 @@
                   </a:tcPr>
                 </a:tc>
               </a:tr>
-              <a:tr h="542544">
+              <a:tr h="887984">
                 <a:tc>
                   <a:txBody>
                     <a:bodyPr/>
                     <a:lstStyle/>
                     <a:p>
                       <a:r>
-                        <a:rPr sz="1200" b="0" i="0">
+                        <a:rPr sz="1100" b="0" i="0">
                           <a:solidFill>
                             <a:srgbClr val="1A1440"/>
                           </a:solidFill>
@@ -44753,7 +44806,7 @@
                     <a:lstStyle/>
                     <a:p>
                       <a:r>
-                        <a:rPr sz="1200" b="0" i="0">
+                        <a:rPr sz="1100" b="0" i="0">
                           <a:solidFill>
                             <a:srgbClr val="1A1440"/>
                           </a:solidFill>
@@ -44775,7 +44828,7 @@
                     <a:lstStyle/>
                     <a:p>
                       <a:r>
-                        <a:rPr sz="1200" b="0" i="0">
+                        <a:rPr sz="1100" b="0" i="0">
                           <a:solidFill>
                             <a:srgbClr val="1A1440"/>
                           </a:solidFill>
@@ -44797,7 +44850,7 @@
                     <a:lstStyle/>
                     <a:p>
                       <a:r>
-                        <a:rPr sz="1200" b="0" i="0">
+                        <a:rPr sz="1100" b="0" i="0">
                           <a:solidFill>
                             <a:srgbClr val="1A1440"/>
                           </a:solidFill>
@@ -44814,14 +44867,14 @@
                   </a:tcPr>
                 </a:tc>
               </a:tr>
-              <a:tr h="542544">
+              <a:tr h="697992">
                 <a:tc>
                   <a:txBody>
                     <a:bodyPr/>
                     <a:lstStyle/>
                     <a:p>
                       <a:r>
-                        <a:rPr sz="1200" b="0" i="0">
+                        <a:rPr sz="1100" b="0" i="0">
                           <a:solidFill>
                             <a:srgbClr val="1A1440"/>
                           </a:solidFill>
@@ -44843,7 +44896,7 @@
                     <a:lstStyle/>
                     <a:p>
                       <a:r>
-                        <a:rPr sz="1200" b="0" i="0">
+                        <a:rPr sz="1100" b="0" i="0">
                           <a:solidFill>
                             <a:srgbClr val="1A1440"/>
                           </a:solidFill>
@@ -44865,7 +44918,7 @@
                     <a:lstStyle/>
                     <a:p>
                       <a:r>
-                        <a:rPr sz="1200" b="0" i="0">
+                        <a:rPr sz="1100" b="0" i="0">
                           <a:solidFill>
                             <a:srgbClr val="1A1440"/>
                           </a:solidFill>
@@ -44887,7 +44940,7 @@
                     <a:lstStyle/>
                     <a:p>
                       <a:r>
-                        <a:rPr sz="1200" b="0" i="0">
+                        <a:rPr sz="1100" b="0" i="0">
                           <a:solidFill>
                             <a:srgbClr val="1A1440"/>
                           </a:solidFill>
@@ -44904,14 +44957,14 @@
                   </a:tcPr>
                 </a:tc>
               </a:tr>
-              <a:tr h="335280">
+              <a:tr h="318008">
                 <a:tc>
                   <a:txBody>
                     <a:bodyPr/>
                     <a:lstStyle/>
                     <a:p>
                       <a:r>
-                        <a:rPr sz="1200" b="0" i="0">
+                        <a:rPr sz="1100" b="0" i="0">
                           <a:solidFill>
                             <a:srgbClr val="1A1440"/>
                           </a:solidFill>
@@ -44933,7 +44986,7 @@
                     <a:lstStyle/>
                     <a:p>
                       <a:r>
-                        <a:rPr sz="1200" b="0" i="0">
+                        <a:rPr sz="1100" b="0" i="0">
                           <a:solidFill>
                             <a:srgbClr val="1A1440"/>
                           </a:solidFill>
@@ -44955,7 +45008,7 @@
                     <a:lstStyle/>
                     <a:p>
                       <a:r>
-                        <a:rPr sz="1200" b="0" i="0">
+                        <a:rPr sz="1100" b="0" i="0">
                           <a:solidFill>
                             <a:srgbClr val="1A1440"/>
                           </a:solidFill>
@@ -44977,7 +45030,7 @@
                     <a:lstStyle/>
                     <a:p>
                       <a:r>
-                        <a:rPr sz="1200" b="0" i="0">
+                        <a:rPr sz="1100" b="0" i="0">
                           <a:solidFill>
                             <a:srgbClr val="1A1440"/>
                           </a:solidFill>
@@ -44994,14 +45047,14 @@
                   </a:tcPr>
                 </a:tc>
               </a:tr>
-              <a:tr h="542544">
+              <a:tr h="508000">
                 <a:tc>
                   <a:txBody>
                     <a:bodyPr/>
                     <a:lstStyle/>
                     <a:p>
                       <a:r>
-                        <a:rPr sz="1200" b="0" i="0">
+                        <a:rPr sz="1100" b="0" i="0">
                           <a:solidFill>
                             <a:srgbClr val="1A1440"/>
                           </a:solidFill>
@@ -45023,7 +45076,7 @@
                     <a:lstStyle/>
                     <a:p>
                       <a:r>
-                        <a:rPr sz="1200" b="0" i="0">
+                        <a:rPr sz="1100" b="0" i="0">
                           <a:solidFill>
                             <a:srgbClr val="1A1440"/>
                           </a:solidFill>
@@ -45045,7 +45098,7 @@
                     <a:lstStyle/>
                     <a:p>
                       <a:r>
-                        <a:rPr sz="1200" b="0" i="0">
+                        <a:rPr sz="1100" b="0" i="0">
                           <a:solidFill>
                             <a:srgbClr val="1A1440"/>
                           </a:solidFill>
@@ -45067,7 +45120,7 @@
                     <a:lstStyle/>
                     <a:p>
                       <a:r>
-                        <a:rPr sz="1200" b="0" i="0">
+                        <a:rPr sz="1100" b="0" i="0">
                           <a:solidFill>
                             <a:srgbClr val="1A1440"/>
                           </a:solidFill>
@@ -45084,14 +45137,14 @@
                   </a:tcPr>
                 </a:tc>
               </a:tr>
-              <a:tr h="335280">
+              <a:tr h="508000">
                 <a:tc>
                   <a:txBody>
                     <a:bodyPr/>
                     <a:lstStyle/>
                     <a:p>
                       <a:r>
-                        <a:rPr sz="1200" b="0" i="0">
+                        <a:rPr sz="1100" b="0" i="0">
                           <a:solidFill>
                             <a:srgbClr val="1A1440"/>
                           </a:solidFill>
@@ -45113,7 +45166,7 @@
                     <a:lstStyle/>
                     <a:p>
                       <a:r>
-                        <a:rPr sz="1200" b="0" i="0">
+                        <a:rPr sz="1100" b="0" i="0">
                           <a:solidFill>
                             <a:srgbClr val="1A1440"/>
                           </a:solidFill>
@@ -45135,7 +45188,7 @@
                     <a:lstStyle/>
                     <a:p>
                       <a:r>
-                        <a:rPr sz="1200" b="0" i="0">
+                        <a:rPr sz="1100" b="0" i="0">
                           <a:solidFill>
                             <a:srgbClr val="1A1440"/>
                           </a:solidFill>
@@ -45157,7 +45210,7 @@
                     <a:lstStyle/>
                     <a:p>
                       <a:r>
-                        <a:rPr sz="1200" b="0" i="0">
+                        <a:rPr sz="1100" b="0" i="0">
                           <a:solidFill>
                             <a:srgbClr val="1A1440"/>
                           </a:solidFill>
@@ -45174,14 +45227,14 @@
                   </a:tcPr>
                 </a:tc>
               </a:tr>
-              <a:tr h="335280">
+              <a:tr h="508000">
                 <a:tc>
                   <a:txBody>
                     <a:bodyPr/>
                     <a:lstStyle/>
                     <a:p>
                       <a:r>
-                        <a:rPr sz="1200" b="0" i="0">
+                        <a:rPr sz="1100" b="0" i="0">
                           <a:solidFill>
                             <a:srgbClr val="1A1440"/>
                           </a:solidFill>
@@ -45203,7 +45256,7 @@
                     <a:lstStyle/>
                     <a:p>
                       <a:r>
-                        <a:rPr sz="1200" b="0" i="0">
+                        <a:rPr sz="1100" b="0" i="0">
                           <a:solidFill>
                             <a:srgbClr val="1A1440"/>
                           </a:solidFill>
@@ -45225,7 +45278,7 @@
                     <a:lstStyle/>
                     <a:p>
                       <a:r>
-                        <a:rPr sz="1200" b="0" i="0">
+                        <a:rPr sz="1100" b="0" i="0">
                           <a:solidFill>
                             <a:srgbClr val="1A1440"/>
                           </a:solidFill>
@@ -45247,7 +45300,7 @@
                     <a:lstStyle/>
                     <a:p>
                       <a:r>
-                        <a:rPr sz="1200" b="0" i="0">
+                        <a:rPr sz="1100" b="0" i="0">
                           <a:solidFill>
                             <a:srgbClr val="1A1440"/>
                           </a:solidFill>
@@ -45264,14 +45317,14 @@
                   </a:tcPr>
                 </a:tc>
               </a:tr>
-              <a:tr h="542544">
+              <a:tr h="508000">
                 <a:tc>
                   <a:txBody>
                     <a:bodyPr/>
                     <a:lstStyle/>
                     <a:p>
                       <a:r>
-                        <a:rPr sz="1200" b="0" i="0">
+                        <a:rPr sz="1100" b="0" i="0">
                           <a:solidFill>
                             <a:srgbClr val="1A1440"/>
                           </a:solidFill>
@@ -45293,7 +45346,7 @@
                     <a:lstStyle/>
                     <a:p>
                       <a:r>
-                        <a:rPr sz="1200" b="0" i="0">
+                        <a:rPr sz="1100" b="0" i="0">
                           <a:solidFill>
                             <a:srgbClr val="1A1440"/>
                           </a:solidFill>
@@ -45315,7 +45368,7 @@
                     <a:lstStyle/>
                     <a:p>
                       <a:r>
-                        <a:rPr sz="1200" b="0" i="0">
+                        <a:rPr sz="1100" b="0" i="0">
                           <a:solidFill>
                             <a:srgbClr val="1A1440"/>
                           </a:solidFill>
@@ -45337,7 +45390,7 @@
                     <a:lstStyle/>
                     <a:p>
                       <a:r>
-                        <a:rPr sz="1200" b="0" i="0">
+                        <a:rPr sz="1100" b="0" i="0">
                           <a:solidFill>
                             <a:srgbClr val="1A1440"/>
                           </a:solidFill>
@@ -45360,7 +45413,7 @@
       </p:graphicFrame>
       <p:sp>
         <p:nvSpPr>
-          <p:cNvPr id="10" name="Oval 9"/>
+          <p:cNvPr id="11" name="Oval 10"/>
           <p:cNvSpPr/>
           <p:nvPr/>
         </p:nvSpPr>
@@ -45404,7 +45457,7 @@
       </p:sp>
       <p:sp>
         <p:nvSpPr>
-          <p:cNvPr id="11" name="TextBox 10"/>
+          <p:cNvPr id="12" name="TextBox 11"/>
           <p:cNvSpPr txBox="1"/>
           <p:nvPr/>
         </p:nvSpPr>
@@ -45439,7 +45492,7 @@
       </p:sp>
       <p:sp>
         <p:nvSpPr>
-          <p:cNvPr id="12" name="Oval 11"/>
+          <p:cNvPr id="13" name="Oval 12"/>
           <p:cNvSpPr/>
           <p:nvPr/>
         </p:nvSpPr>
@@ -45483,7 +45536,7 @@
       </p:sp>
       <p:sp>
         <p:nvSpPr>
-          <p:cNvPr id="13" name="TextBox 12"/>
+          <p:cNvPr id="14" name="TextBox 13"/>
           <p:cNvSpPr txBox="1"/>
           <p:nvPr/>
         </p:nvSpPr>
@@ -45518,7 +45571,7 @@
       </p:sp>
       <p:sp>
         <p:nvSpPr>
-          <p:cNvPr id="14" name="Oval 13"/>
+          <p:cNvPr id="15" name="Oval 14"/>
           <p:cNvSpPr/>
           <p:nvPr/>
         </p:nvSpPr>
@@ -45562,7 +45615,7 @@
       </p:sp>
       <p:sp>
         <p:nvSpPr>
-          <p:cNvPr id="15" name="TextBox 14"/>
+          <p:cNvPr id="16" name="TextBox 15"/>
           <p:cNvSpPr txBox="1"/>
           <p:nvPr/>
         </p:nvSpPr>
@@ -45597,7 +45650,7 @@
       </p:sp>
       <p:sp>
         <p:nvSpPr>
-          <p:cNvPr id="16" name="Oval 15"/>
+          <p:cNvPr id="17" name="Oval 16"/>
           <p:cNvSpPr/>
           <p:nvPr/>
         </p:nvSpPr>
@@ -45641,7 +45694,7 @@
       </p:sp>
       <p:sp>
         <p:nvSpPr>
-          <p:cNvPr id="17" name="TextBox 16"/>
+          <p:cNvPr id="18" name="TextBox 17"/>
           <p:cNvSpPr txBox="1"/>
           <p:nvPr/>
         </p:nvSpPr>
@@ -45676,7 +45729,7 @@
       </p:sp>
       <p:sp>
         <p:nvSpPr>
-          <p:cNvPr id="18" name="Oval 17"/>
+          <p:cNvPr id="19" name="Oval 18"/>
           <p:cNvSpPr/>
           <p:nvPr/>
         </p:nvSpPr>
@@ -45720,7 +45773,7 @@
       </p:sp>
       <p:sp>
         <p:nvSpPr>
-          <p:cNvPr id="19" name="TextBox 18"/>
+          <p:cNvPr id="20" name="TextBox 19"/>
           <p:cNvSpPr txBox="1"/>
           <p:nvPr/>
         </p:nvSpPr>
@@ -45755,7 +45808,7 @@
       </p:sp>
       <p:sp>
         <p:nvSpPr>
-          <p:cNvPr id="20" name="TextBox 19"/>
+          <p:cNvPr id="21" name="TextBox 20"/>
           <p:cNvSpPr txBox="1"/>
           <p:nvPr/>
         </p:nvSpPr>
